--- a/20_Projects/SGIS_MTV/SGIS_MTV_WorkPlan_v3.0pt.pptx
+++ b/20_Projects/SGIS_MTV/SGIS_MTV_WorkPlan_v3.0pt.pptx
@@ -3077,7 +3077,27 @@
                 <a:ea typeface="맑은 고딕" pitchFamily="34" charset="-122"/>
                 <a:cs typeface="맑은 고딕" pitchFamily="34" charset="-120"/>
               </a:rPr>
-              <a:t>랙 설치 · 전원 · 관리 2포트 · IPMI 결선</a:t>
+              <a:t>랙 설치 · 전원 · IPMI 결선</a:t>
+            </a:r>
+            <a:endParaRPr lang="en-US" sz="1200" dirty="0"/>
+          </a:p>
+          <a:p>
+            <a:pPr indent="0" marL="0">
+              <a:spcAft>
+                <a:spcPts val="300"/>
+              </a:spcAft>
+              <a:buNone/>
+            </a:pPr>
+            <a:r>
+              <a:rPr lang="en-US" sz="1200" dirty="0">
+                <a:solidFill>
+                  <a:srgbClr val="334155"/>
+                </a:solidFill>
+                <a:latin typeface="맑은 고딕" pitchFamily="34" charset="0"/>
+                <a:ea typeface="맑은 고딕" pitchFamily="34" charset="-122"/>
+                <a:cs typeface="맑은 고딕" pitchFamily="34" charset="-120"/>
+              </a:rPr>
+              <a:t>관리망: Bastion 2 · Master KVM 4회선</a:t>
             </a:r>
             <a:endParaRPr lang="en-US" sz="1200" dirty="0"/>
           </a:p>
@@ -3687,7 +3707,7 @@
         <p:spPr>
           <a:xfrm>
             <a:off x="457200" y="4297680"/>
-            <a:ext cx="11274552" cy="365760"/>
+            <a:ext cx="11274552" cy="640080"/>
           </a:xfrm>
           <a:prstGeom prst="rect">
             <a:avLst/>
@@ -3712,6 +3732,23 @@
                 <a:cs typeface="맑은 고딕" pitchFamily="34" charset="-120"/>
               </a:rPr>
               <a:t>기존 HV(Worker 전환 대상): 6포트(관리·서비스·nasbak 각 2) + FC + IPMI 그대로 사용</a:t>
+            </a:r>
+            <a:endParaRPr lang="en-US" sz="1200" dirty="0"/>
+          </a:p>
+          <a:p>
+            <a:pPr indent="0" marL="0">
+              <a:buNone/>
+            </a:pPr>
+            <a:r>
+              <a:rPr lang="en-US" sz="1200" dirty="0">
+                <a:solidFill>
+                  <a:srgbClr val="334155"/>
+                </a:solidFill>
+                <a:latin typeface="맑은 고딕" pitchFamily="34" charset="0"/>
+                <a:ea typeface="맑은 고딕" pitchFamily="34" charset="-122"/>
+                <a:cs typeface="맑은 고딕" pitchFamily="34" charset="-120"/>
+              </a:rPr>
+              <a:t>Master KVM 호스트(외부 TNS-2100 #B · 내부 HV#03): 관리망 4회선 (2회선 호스트 원격접속 · 2회선 br0 브리지)</a:t>
             </a:r>
             <a:endParaRPr lang="en-US" sz="1200" dirty="0"/>
           </a:p>
@@ -4192,7 +4229,7 @@
                 <a:ea typeface="맑은 고딕" pitchFamily="34" charset="-122"/>
                 <a:cs typeface="맑은 고딕" pitchFamily="34" charset="-120"/>
               </a:rPr>
-              <a:t>망별 6개 (관리망 5 · nasbak 1) · 외부·내부 합계 12개</a:t>
+              <a:t>망별 7개 (관리망 6 · nasbak 1) · 외부·내부 합계 14개 · 할당 10월(1차)</a:t>
             </a:r>
             <a:endParaRPr lang="en-US" sz="1500" dirty="0"/>
           </a:p>
@@ -4206,18 +4243,304 @@
         </p:nvSpPr>
         <p:spPr>
           <a:xfrm>
-            <a:off x="457200" y="1783080"/>
-            <a:ext cx="1737360" cy="1417320"/>
+            <a:off x="457200" y="1691640"/>
+            <a:ext cx="5532120" cy="411480"/>
           </a:xfrm>
           <a:prstGeom prst="roundRect">
             <a:avLst>
-              <a:gd name="adj" fmla="val 5161"/>
+              <a:gd name="adj" fmla="val 13333"/>
             </a:avLst>
+          </a:prstGeom>
+          <a:solidFill>
+            <a:srgbClr val="1E3A5F"/>
+          </a:solidFill>
+          <a:ln w="12700">
+            <a:solidFill>
+              <a:srgbClr val="1E3A5F"/>
+            </a:solidFill>
+            <a:prstDash val="solid"/>
+          </a:ln>
+        </p:spPr>
+      </p:sp>
+      <p:sp>
+        <p:nvSpPr>
+          <p:cNvPr id="11" name="Text 8"/>
+          <p:cNvSpPr/>
+          <p:nvPr/>
+        </p:nvSpPr>
+        <p:spPr>
+          <a:xfrm>
+            <a:off x="594360" y="1691640"/>
+            <a:ext cx="5257800" cy="411480"/>
+          </a:xfrm>
+          <a:prstGeom prst="rect">
+            <a:avLst/>
+          </a:prstGeom>
+          <a:noFill/>
+          <a:ln/>
+        </p:spPr>
+        <p:txBody>
+          <a:bodyPr wrap="square" lIns="0" tIns="0" rIns="0" bIns="0" rtlCol="0" anchor="ctr"/>
+          <a:lstStyle/>
+          <a:p>
+            <a:pPr indent="0" marL="0">
+              <a:buNone/>
+            </a:pPr>
+            <a:r>
+              <a:rPr lang="en-US" sz="1400" b="1" dirty="0">
+                <a:solidFill>
+                  <a:srgbClr val="FFFFFF"/>
+                </a:solidFill>
+                <a:latin typeface="맑은 고딕" pitchFamily="34" charset="0"/>
+                <a:ea typeface="맑은 고딕" pitchFamily="34" charset="-122"/>
+                <a:cs typeface="맑은 고딕" pitchFamily="34" charset="-120"/>
+              </a:rPr>
+              <a:t>외부망 · 신규 IP 7개</a:t>
+            </a:r>
+            <a:endParaRPr lang="en-US" sz="1400" dirty="0"/>
+          </a:p>
+        </p:txBody>
+      </p:sp>
+      <p:sp>
+        <p:nvSpPr>
+          <p:cNvPr id="12" name="Text 9"/>
+          <p:cNvSpPr/>
+          <p:nvPr/>
+        </p:nvSpPr>
+        <p:spPr>
+          <a:xfrm>
+            <a:off x="594360" y="2157984"/>
+            <a:ext cx="1371600" cy="228600"/>
+          </a:xfrm>
+          <a:prstGeom prst="rect">
+            <a:avLst/>
+          </a:prstGeom>
+          <a:noFill/>
+          <a:ln/>
+        </p:spPr>
+        <p:txBody>
+          <a:bodyPr wrap="square" lIns="0" tIns="0" rIns="0" bIns="0" rtlCol="0" anchor="t"/>
+          <a:lstStyle/>
+          <a:p>
+            <a:pPr indent="0" marL="0">
+              <a:buNone/>
+            </a:pPr>
+            <a:r>
+              <a:rPr lang="en-US" sz="1000" b="1" dirty="0">
+                <a:solidFill>
+                  <a:srgbClr val="64748B"/>
+                </a:solidFill>
+                <a:latin typeface="맑은 고딕" pitchFamily="34" charset="0"/>
+                <a:ea typeface="맑은 고딕" pitchFamily="34" charset="-122"/>
+                <a:cs typeface="맑은 고딕" pitchFamily="34" charset="-120"/>
+              </a:rPr>
+              <a:t>장비</a:t>
+            </a:r>
+            <a:endParaRPr lang="en-US" sz="1000" dirty="0"/>
+          </a:p>
+        </p:txBody>
+      </p:sp>
+      <p:sp>
+        <p:nvSpPr>
+          <p:cNvPr id="13" name="Text 10"/>
+          <p:cNvSpPr/>
+          <p:nvPr/>
+        </p:nvSpPr>
+        <p:spPr>
+          <a:xfrm>
+            <a:off x="3154680" y="2157984"/>
+            <a:ext cx="1371600" cy="228600"/>
+          </a:xfrm>
+          <a:prstGeom prst="rect">
+            <a:avLst/>
+          </a:prstGeom>
+          <a:noFill/>
+          <a:ln/>
+        </p:spPr>
+        <p:txBody>
+          <a:bodyPr wrap="square" lIns="0" tIns="0" rIns="0" bIns="0" rtlCol="0" anchor="t"/>
+          <a:lstStyle/>
+          <a:p>
+            <a:pPr indent="0" marL="0">
+              <a:buNone/>
+            </a:pPr>
+            <a:r>
+              <a:rPr lang="en-US" sz="1000" b="1" dirty="0">
+                <a:solidFill>
+                  <a:srgbClr val="64748B"/>
+                </a:solidFill>
+                <a:latin typeface="맑은 고딕" pitchFamily="34" charset="0"/>
+                <a:ea typeface="맑은 고딕" pitchFamily="34" charset="-122"/>
+                <a:cs typeface="맑은 고딕" pitchFamily="34" charset="-120"/>
+              </a:rPr>
+              <a:t>할당 IP</a:t>
+            </a:r>
+            <a:endParaRPr lang="en-US" sz="1000" dirty="0"/>
+          </a:p>
+        </p:txBody>
+      </p:sp>
+      <p:sp>
+        <p:nvSpPr>
+          <p:cNvPr id="14" name="Text 11"/>
+          <p:cNvSpPr/>
+          <p:nvPr/>
+        </p:nvSpPr>
+        <p:spPr>
+          <a:xfrm>
+            <a:off x="5257800" y="2157984"/>
+            <a:ext cx="1371600" cy="228600"/>
+          </a:xfrm>
+          <a:prstGeom prst="rect">
+            <a:avLst/>
+          </a:prstGeom>
+          <a:noFill/>
+          <a:ln/>
+        </p:spPr>
+        <p:txBody>
+          <a:bodyPr wrap="square" lIns="0" tIns="0" rIns="0" bIns="0" rtlCol="0" anchor="t"/>
+          <a:lstStyle/>
+          <a:p>
+            <a:pPr indent="0" marL="0">
+              <a:buNone/>
+            </a:pPr>
+            <a:r>
+              <a:rPr lang="en-US" sz="1000" b="1" dirty="0">
+                <a:solidFill>
+                  <a:srgbClr val="64748B"/>
+                </a:solidFill>
+                <a:latin typeface="맑은 고딕" pitchFamily="34" charset="0"/>
+                <a:ea typeface="맑은 고딕" pitchFamily="34" charset="-122"/>
+                <a:cs typeface="맑은 고딕" pitchFamily="34" charset="-120"/>
+              </a:rPr>
+              <a:t>개수</a:t>
+            </a:r>
+            <a:endParaRPr lang="en-US" sz="1000" dirty="0"/>
+          </a:p>
+        </p:txBody>
+      </p:sp>
+      <p:sp>
+        <p:nvSpPr>
+          <p:cNvPr id="15" name="Shape 12"/>
+          <p:cNvSpPr/>
+          <p:nvPr/>
+        </p:nvSpPr>
+        <p:spPr>
+          <a:xfrm>
+            <a:off x="457200" y="2423160"/>
+            <a:ext cx="5532120" cy="475488"/>
+          </a:xfrm>
+          <a:prstGeom prst="rect">
+            <a:avLst/>
           </a:prstGeom>
           <a:solidFill>
             <a:srgbClr val="F5F7FA"/>
           </a:solidFill>
-          <a:ln w="19050">
+          <a:ln w="9525">
+            <a:solidFill>
+              <a:srgbClr val="CBD5E1"/>
+            </a:solidFill>
+            <a:prstDash val="solid"/>
+          </a:ln>
+        </p:spPr>
+      </p:sp>
+      <p:sp>
+        <p:nvSpPr>
+          <p:cNvPr id="16" name="Text 13"/>
+          <p:cNvSpPr/>
+          <p:nvPr/>
+        </p:nvSpPr>
+        <p:spPr>
+          <a:xfrm>
+            <a:off x="594360" y="2459736"/>
+            <a:ext cx="2377440" cy="228600"/>
+          </a:xfrm>
+          <a:prstGeom prst="rect">
+            <a:avLst/>
+          </a:prstGeom>
+          <a:noFill/>
+          <a:ln/>
+        </p:spPr>
+        <p:txBody>
+          <a:bodyPr wrap="square" lIns="0" tIns="0" rIns="0" bIns="0" rtlCol="0" anchor="t"/>
+          <a:lstStyle/>
+          <a:p>
+            <a:pPr indent="0" marL="0">
+              <a:buNone/>
+            </a:pPr>
+            <a:r>
+              <a:rPr lang="en-US" sz="1200" b="1" dirty="0">
+                <a:solidFill>
+                  <a:srgbClr val="1F2A3A"/>
+                </a:solidFill>
+                <a:latin typeface="맑은 고딕" pitchFamily="34" charset="0"/>
+                <a:ea typeface="맑은 고딕" pitchFamily="34" charset="-122"/>
+                <a:cs typeface="맑은 고딕" pitchFamily="34" charset="-120"/>
+              </a:rPr>
+              <a:t>Bastion</a:t>
+            </a:r>
+            <a:endParaRPr lang="en-US" sz="1200" dirty="0"/>
+          </a:p>
+        </p:txBody>
+      </p:sp>
+      <p:sp>
+        <p:nvSpPr>
+          <p:cNvPr id="17" name="Text 14"/>
+          <p:cNvSpPr/>
+          <p:nvPr/>
+        </p:nvSpPr>
+        <p:spPr>
+          <a:xfrm>
+            <a:off x="594360" y="2679192"/>
+            <a:ext cx="2514600" cy="201168"/>
+          </a:xfrm>
+          <a:prstGeom prst="rect">
+            <a:avLst/>
+          </a:prstGeom>
+          <a:noFill/>
+          <a:ln/>
+        </p:spPr>
+        <p:txBody>
+          <a:bodyPr wrap="square" lIns="0" tIns="0" rIns="0" bIns="0" rtlCol="0" anchor="t"/>
+          <a:lstStyle/>
+          <a:p>
+            <a:pPr indent="0" marL="0">
+              <a:buNone/>
+            </a:pPr>
+            <a:r>
+              <a:rPr lang="en-US" sz="900" dirty="0">
+                <a:solidFill>
+                  <a:srgbClr val="64748B"/>
+                </a:solidFill>
+                <a:latin typeface="맑은 고딕" pitchFamily="34" charset="0"/>
+                <a:ea typeface="맑은 고딕" pitchFamily="34" charset="-122"/>
+                <a:cs typeface="맑은 고딕" pitchFamily="34" charset="-120"/>
+              </a:rPr>
+              <a:t>TNS-2100 · 신규 장비</a:t>
+            </a:r>
+            <a:endParaRPr lang="en-US" sz="900" dirty="0"/>
+          </a:p>
+        </p:txBody>
+      </p:sp>
+      <p:sp>
+        <p:nvSpPr>
+          <p:cNvPr id="18" name="Shape 15"/>
+          <p:cNvSpPr/>
+          <p:nvPr/>
+        </p:nvSpPr>
+        <p:spPr>
+          <a:xfrm>
+            <a:off x="3154680" y="2523744"/>
+            <a:ext cx="845820" cy="274320"/>
+          </a:xfrm>
+          <a:prstGeom prst="roundRect">
+            <a:avLst>
+              <a:gd name="adj" fmla="val 50000"/>
+            </a:avLst>
+          </a:prstGeom>
+          <a:solidFill>
+            <a:srgbClr val="6D5AA6"/>
+          </a:solidFill>
+          <a:ln w="12700">
             <a:solidFill>
               <a:srgbClr val="6D5AA6"/>
             </a:solidFill>
@@ -4227,116 +4550,38 @@
       </p:sp>
       <p:sp>
         <p:nvSpPr>
-          <p:cNvPr id="11" name="Text 8"/>
-          <p:cNvSpPr/>
-          <p:nvPr/>
-        </p:nvSpPr>
-        <p:spPr>
-          <a:xfrm>
-            <a:off x="457200" y="1874520"/>
-            <a:ext cx="1737360" cy="411480"/>
-          </a:xfrm>
-          <a:prstGeom prst="rect">
-            <a:avLst/>
-          </a:prstGeom>
-          <a:noFill/>
-          <a:ln/>
-        </p:spPr>
-        <p:txBody>
-          <a:bodyPr wrap="square" lIns="0" tIns="0" rIns="0" bIns="0" rtlCol="0" anchor="t"/>
+          <p:cNvPr id="19" name="Text 16"/>
+          <p:cNvSpPr/>
+          <p:nvPr/>
+        </p:nvSpPr>
+        <p:spPr>
+          <a:xfrm>
+            <a:off x="3154680" y="2523744"/>
+            <a:ext cx="845820" cy="274320"/>
+          </a:xfrm>
+          <a:prstGeom prst="rect">
+            <a:avLst/>
+          </a:prstGeom>
+          <a:noFill/>
+          <a:ln/>
+        </p:spPr>
+        <p:txBody>
+          <a:bodyPr wrap="square" lIns="0" tIns="0" rIns="0" bIns="0" rtlCol="0" anchor="ctr"/>
           <a:lstStyle/>
           <a:p>
             <a:pPr algn="ctr" indent="0" marL="0">
               <a:buNone/>
             </a:pPr>
             <a:r>
-              <a:rPr lang="en-US" sz="2200" b="1" dirty="0">
-                <a:solidFill>
-                  <a:srgbClr val="6D5AA6"/>
-                </a:solidFill>
-                <a:latin typeface="맑은 고딕" pitchFamily="34" charset="0"/>
-                <a:ea typeface="맑은 고딕" pitchFamily="34" charset="-122"/>
-                <a:cs typeface="맑은 고딕" pitchFamily="34" charset="-120"/>
-              </a:rPr>
-              <a:t>1</a:t>
-            </a:r>
-            <a:endParaRPr lang="en-US" sz="2200" dirty="0"/>
-          </a:p>
-        </p:txBody>
-      </p:sp>
-      <p:sp>
-        <p:nvSpPr>
-          <p:cNvPr id="12" name="Text 9"/>
-          <p:cNvSpPr/>
-          <p:nvPr/>
-        </p:nvSpPr>
-        <p:spPr>
-          <a:xfrm>
-            <a:off x="502920" y="2331720"/>
-            <a:ext cx="1645920" cy="411480"/>
-          </a:xfrm>
-          <a:prstGeom prst="rect">
-            <a:avLst/>
-          </a:prstGeom>
-          <a:noFill/>
-          <a:ln/>
-        </p:spPr>
-        <p:txBody>
-          <a:bodyPr wrap="square" lIns="0" tIns="0" rIns="0" bIns="0" rtlCol="0" anchor="t"/>
-          <a:lstStyle/>
-          <a:p>
-            <a:pPr algn="ctr" indent="0" marL="0">
-              <a:buNone/>
-            </a:pPr>
-            <a:r>
-              <a:rPr lang="en-US" sz="1150" b="1" dirty="0">
-                <a:solidFill>
-                  <a:srgbClr val="1F2A3A"/>
-                </a:solidFill>
-                <a:latin typeface="맑은 고딕" pitchFamily="34" charset="0"/>
-                <a:ea typeface="맑은 고딕" pitchFamily="34" charset="-122"/>
-                <a:cs typeface="맑은 고딕" pitchFamily="34" charset="-120"/>
-              </a:rPr>
-              <a:t>Bastion</a:t>
-            </a:r>
-            <a:endParaRPr lang="en-US" sz="1150" dirty="0"/>
-          </a:p>
-        </p:txBody>
-      </p:sp>
-      <p:sp>
-        <p:nvSpPr>
-          <p:cNvPr id="13" name="Text 10"/>
-          <p:cNvSpPr/>
-          <p:nvPr/>
-        </p:nvSpPr>
-        <p:spPr>
-          <a:xfrm>
-            <a:off x="502920" y="2788920"/>
-            <a:ext cx="1645920" cy="274320"/>
-          </a:xfrm>
-          <a:prstGeom prst="rect">
-            <a:avLst/>
-          </a:prstGeom>
-          <a:noFill/>
-          <a:ln/>
-        </p:spPr>
-        <p:txBody>
-          <a:bodyPr wrap="square" lIns="0" tIns="0" rIns="0" bIns="0" rtlCol="0" anchor="t"/>
-          <a:lstStyle/>
-          <a:p>
-            <a:pPr algn="ctr" indent="0" marL="0">
-              <a:buNone/>
-            </a:pPr>
-            <a:r>
               <a:rPr lang="en-US" sz="1000" b="1" dirty="0">
                 <a:solidFill>
-                  <a:srgbClr val="6D5AA6"/>
-                </a:solidFill>
-                <a:latin typeface="맑은 고딕" pitchFamily="34" charset="0"/>
-                <a:ea typeface="맑은 고딕" pitchFamily="34" charset="-122"/>
-                <a:cs typeface="맑은 고딕" pitchFamily="34" charset="-120"/>
-              </a:rPr>
-              <a:t>관리망</a:t>
+                  <a:srgbClr val="FFFFFF"/>
+                </a:solidFill>
+                <a:latin typeface="맑은 고딕" pitchFamily="34" charset="0"/>
+                <a:ea typeface="맑은 고딕" pitchFamily="34" charset="-122"/>
+                <a:cs typeface="맑은 고딕" pitchFamily="34" charset="-120"/>
+              </a:rPr>
+              <a:t>관리망 1</a:t>
             </a:r>
             <a:endParaRPr lang="en-US" sz="1000" dirty="0"/>
           </a:p>
@@ -4344,24 +4589,24 @@
       </p:sp>
       <p:sp>
         <p:nvSpPr>
-          <p:cNvPr id="14" name="Shape 11"/>
-          <p:cNvSpPr/>
-          <p:nvPr/>
-        </p:nvSpPr>
-        <p:spPr>
-          <a:xfrm>
-            <a:off x="2359152" y="1783080"/>
-            <a:ext cx="1737360" cy="1417320"/>
+          <p:cNvPr id="20" name="Shape 17"/>
+          <p:cNvSpPr/>
+          <p:nvPr/>
+        </p:nvSpPr>
+        <p:spPr>
+          <a:xfrm>
+            <a:off x="4091940" y="2523744"/>
+            <a:ext cx="1188720" cy="274320"/>
           </a:xfrm>
           <a:prstGeom prst="roundRect">
             <a:avLst>
-              <a:gd name="adj" fmla="val 5161"/>
+              <a:gd name="adj" fmla="val 50000"/>
             </a:avLst>
           </a:prstGeom>
           <a:solidFill>
-            <a:srgbClr val="F5F7FA"/>
+            <a:srgbClr val="B0752F"/>
           </a:solidFill>
-          <a:ln w="19050">
+          <a:ln w="12700">
             <a:solidFill>
               <a:srgbClr val="B0752F"/>
             </a:solidFill>
@@ -4371,32 +4616,71 @@
       </p:sp>
       <p:sp>
         <p:nvSpPr>
-          <p:cNvPr id="15" name="Text 12"/>
-          <p:cNvSpPr/>
-          <p:nvPr/>
-        </p:nvSpPr>
-        <p:spPr>
-          <a:xfrm>
-            <a:off x="2359152" y="1874520"/>
-            <a:ext cx="1737360" cy="411480"/>
-          </a:xfrm>
-          <a:prstGeom prst="rect">
-            <a:avLst/>
-          </a:prstGeom>
-          <a:noFill/>
-          <a:ln/>
-        </p:spPr>
-        <p:txBody>
-          <a:bodyPr wrap="square" lIns="0" tIns="0" rIns="0" bIns="0" rtlCol="0" anchor="t"/>
+          <p:cNvPr id="21" name="Text 18"/>
+          <p:cNvSpPr/>
+          <p:nvPr/>
+        </p:nvSpPr>
+        <p:spPr>
+          <a:xfrm>
+            <a:off x="4091940" y="2523744"/>
+            <a:ext cx="1188720" cy="274320"/>
+          </a:xfrm>
+          <a:prstGeom prst="rect">
+            <a:avLst/>
+          </a:prstGeom>
+          <a:noFill/>
+          <a:ln/>
+        </p:spPr>
+        <p:txBody>
+          <a:bodyPr wrap="square" lIns="0" tIns="0" rIns="0" bIns="0" rtlCol="0" anchor="ctr"/>
           <a:lstStyle/>
           <a:p>
             <a:pPr algn="ctr" indent="0" marL="0">
               <a:buNone/>
             </a:pPr>
             <a:r>
-              <a:rPr lang="en-US" sz="2200" b="1" dirty="0">
-                <a:solidFill>
-                  <a:srgbClr val="B0752F"/>
+              <a:rPr lang="en-US" sz="1000" b="1" dirty="0">
+                <a:solidFill>
+                  <a:srgbClr val="FFFFFF"/>
+                </a:solidFill>
+                <a:latin typeface="맑은 고딕" pitchFamily="34" charset="0"/>
+                <a:ea typeface="맑은 고딕" pitchFamily="34" charset="-122"/>
+                <a:cs typeface="맑은 고딕" pitchFamily="34" charset="-120"/>
+              </a:rPr>
+              <a:t>nasbak 1</a:t>
+            </a:r>
+            <a:endParaRPr lang="en-US" sz="1000" dirty="0"/>
+          </a:p>
+        </p:txBody>
+      </p:sp>
+      <p:sp>
+        <p:nvSpPr>
+          <p:cNvPr id="22" name="Text 19"/>
+          <p:cNvSpPr/>
+          <p:nvPr/>
+        </p:nvSpPr>
+        <p:spPr>
+          <a:xfrm>
+            <a:off x="5212080" y="2423160"/>
+            <a:ext cx="640080" cy="475488"/>
+          </a:xfrm>
+          <a:prstGeom prst="rect">
+            <a:avLst/>
+          </a:prstGeom>
+          <a:noFill/>
+          <a:ln/>
+        </p:spPr>
+        <p:txBody>
+          <a:bodyPr wrap="square" lIns="0" tIns="0" rIns="0" bIns="0" rtlCol="0" anchor="ctr"/>
+          <a:lstStyle/>
+          <a:p>
+            <a:pPr algn="ctr" indent="0" marL="0">
+              <a:buNone/>
+            </a:pPr>
+            <a:r>
+              <a:rPr lang="en-US" sz="1600" b="1" dirty="0">
+                <a:solidFill>
+                  <a:srgbClr val="1E3A5F"/>
                 </a:solidFill>
                 <a:latin typeface="맑은 고딕" pitchFamily="34" charset="0"/>
                 <a:ea typeface="맑은 고딕" pitchFamily="34" charset="-122"/>
@@ -4404,108 +4688,133 @@
               </a:rPr>
               <a:t>2</a:t>
             </a:r>
-            <a:endParaRPr lang="en-US" sz="2200" dirty="0"/>
-          </a:p>
-        </p:txBody>
-      </p:sp>
-      <p:sp>
-        <p:nvSpPr>
-          <p:cNvPr id="16" name="Text 13"/>
-          <p:cNvSpPr/>
-          <p:nvPr/>
-        </p:nvSpPr>
-        <p:spPr>
-          <a:xfrm>
-            <a:off x="2404872" y="2331720"/>
-            <a:ext cx="1645920" cy="411480"/>
-          </a:xfrm>
-          <a:prstGeom prst="rect">
-            <a:avLst/>
-          </a:prstGeom>
-          <a:noFill/>
-          <a:ln/>
-        </p:spPr>
-        <p:txBody>
-          <a:bodyPr wrap="square" lIns="0" tIns="0" rIns="0" bIns="0" rtlCol="0" anchor="t"/>
-          <a:lstStyle/>
-          <a:p>
-            <a:pPr algn="ctr" indent="0" marL="0">
-              <a:buNone/>
-            </a:pPr>
-            <a:r>
-              <a:rPr lang="en-US" sz="1150" b="1" dirty="0">
-                <a:solidFill>
-                  <a:srgbClr val="1F2A3A"/>
-                </a:solidFill>
-                <a:latin typeface="맑은 고딕" pitchFamily="34" charset="0"/>
-                <a:ea typeface="맑은 고딕" pitchFamily="34" charset="-122"/>
-                <a:cs typeface="맑은 고딕" pitchFamily="34" charset="-120"/>
-              </a:rPr>
-              <a:t>Bastion</a:t>
-            </a:r>
-            <a:endParaRPr lang="en-US" sz="1150" dirty="0"/>
-          </a:p>
-        </p:txBody>
-      </p:sp>
-      <p:sp>
-        <p:nvSpPr>
-          <p:cNvPr id="17" name="Text 14"/>
-          <p:cNvSpPr/>
-          <p:nvPr/>
-        </p:nvSpPr>
-        <p:spPr>
-          <a:xfrm>
-            <a:off x="2404872" y="2788920"/>
-            <a:ext cx="1645920" cy="274320"/>
-          </a:xfrm>
-          <a:prstGeom prst="rect">
-            <a:avLst/>
-          </a:prstGeom>
-          <a:noFill/>
-          <a:ln/>
-        </p:spPr>
-        <p:txBody>
-          <a:bodyPr wrap="square" lIns="0" tIns="0" rIns="0" bIns="0" rtlCol="0" anchor="t"/>
-          <a:lstStyle/>
-          <a:p>
-            <a:pPr algn="ctr" indent="0" marL="0">
-              <a:buNone/>
-            </a:pPr>
-            <a:r>
-              <a:rPr lang="en-US" sz="1000" b="1" dirty="0">
-                <a:solidFill>
-                  <a:srgbClr val="B0752F"/>
-                </a:solidFill>
-                <a:latin typeface="맑은 고딕" pitchFamily="34" charset="0"/>
-                <a:ea typeface="맑은 고딕" pitchFamily="34" charset="-122"/>
-                <a:cs typeface="맑은 고딕" pitchFamily="34" charset="-120"/>
-              </a:rPr>
-              <a:t>nasbak</a:t>
-            </a:r>
-            <a:endParaRPr lang="en-US" sz="1000" dirty="0"/>
-          </a:p>
-        </p:txBody>
-      </p:sp>
-      <p:sp>
-        <p:nvSpPr>
-          <p:cNvPr id="18" name="Shape 15"/>
-          <p:cNvSpPr/>
-          <p:nvPr/>
-        </p:nvSpPr>
-        <p:spPr>
-          <a:xfrm>
-            <a:off x="4261104" y="1783080"/>
-            <a:ext cx="1737360" cy="1417320"/>
-          </a:xfrm>
-          <a:prstGeom prst="roundRect">
-            <a:avLst>
-              <a:gd name="adj" fmla="val 5161"/>
-            </a:avLst>
+            <a:endParaRPr lang="en-US" sz="1600" dirty="0"/>
+          </a:p>
+        </p:txBody>
+      </p:sp>
+      <p:sp>
+        <p:nvSpPr>
+          <p:cNvPr id="23" name="Shape 20"/>
+          <p:cNvSpPr/>
+          <p:nvPr/>
+        </p:nvSpPr>
+        <p:spPr>
+          <a:xfrm>
+            <a:off x="457200" y="2935224"/>
+            <a:ext cx="5532120" cy="475488"/>
+          </a:xfrm>
+          <a:prstGeom prst="rect">
+            <a:avLst/>
           </a:prstGeom>
           <a:solidFill>
             <a:srgbClr val="F5F7FA"/>
           </a:solidFill>
-          <a:ln w="19050">
+          <a:ln w="9525">
+            <a:solidFill>
+              <a:srgbClr val="CBD5E1"/>
+            </a:solidFill>
+            <a:prstDash val="solid"/>
+          </a:ln>
+        </p:spPr>
+      </p:sp>
+      <p:sp>
+        <p:nvSpPr>
+          <p:cNvPr id="24" name="Text 21"/>
+          <p:cNvSpPr/>
+          <p:nvPr/>
+        </p:nvSpPr>
+        <p:spPr>
+          <a:xfrm>
+            <a:off x="594360" y="2971800"/>
+            <a:ext cx="2377440" cy="228600"/>
+          </a:xfrm>
+          <a:prstGeom prst="rect">
+            <a:avLst/>
+          </a:prstGeom>
+          <a:noFill/>
+          <a:ln/>
+        </p:spPr>
+        <p:txBody>
+          <a:bodyPr wrap="square" lIns="0" tIns="0" rIns="0" bIns="0" rtlCol="0" anchor="t"/>
+          <a:lstStyle/>
+          <a:p>
+            <a:pPr indent="0" marL="0">
+              <a:buNone/>
+            </a:pPr>
+            <a:r>
+              <a:rPr lang="en-US" sz="1200" b="1" dirty="0">
+                <a:solidFill>
+                  <a:srgbClr val="1F2A3A"/>
+                </a:solidFill>
+                <a:latin typeface="맑은 고딕" pitchFamily="34" charset="0"/>
+                <a:ea typeface="맑은 고딕" pitchFamily="34" charset="-122"/>
+                <a:cs typeface="맑은 고딕" pitchFamily="34" charset="-120"/>
+              </a:rPr>
+              <a:t>Master KVM</a:t>
+            </a:r>
+            <a:endParaRPr lang="en-US" sz="1200" dirty="0"/>
+          </a:p>
+        </p:txBody>
+      </p:sp>
+      <p:sp>
+        <p:nvSpPr>
+          <p:cNvPr id="25" name="Text 22"/>
+          <p:cNvSpPr/>
+          <p:nvPr/>
+        </p:nvSpPr>
+        <p:spPr>
+          <a:xfrm>
+            <a:off x="594360" y="3191256"/>
+            <a:ext cx="2514600" cy="201168"/>
+          </a:xfrm>
+          <a:prstGeom prst="rect">
+            <a:avLst/>
+          </a:prstGeom>
+          <a:noFill/>
+          <a:ln/>
+        </p:spPr>
+        <p:txBody>
+          <a:bodyPr wrap="square" lIns="0" tIns="0" rIns="0" bIns="0" rtlCol="0" anchor="t"/>
+          <a:lstStyle/>
+          <a:p>
+            <a:pPr indent="0" marL="0">
+              <a:buNone/>
+            </a:pPr>
+            <a:r>
+              <a:rPr lang="en-US" sz="900" dirty="0">
+                <a:solidFill>
+                  <a:srgbClr val="64748B"/>
+                </a:solidFill>
+                <a:latin typeface="맑은 고딕" pitchFamily="34" charset="0"/>
+                <a:ea typeface="맑은 고딕" pitchFamily="34" charset="-122"/>
+                <a:cs typeface="맑은 고딕" pitchFamily="34" charset="-120"/>
+              </a:rPr>
+              <a:t>TNS-2100 · 신규 장비 · 관리 4회선</a:t>
+            </a:r>
+            <a:endParaRPr lang="en-US" sz="900" dirty="0"/>
+          </a:p>
+        </p:txBody>
+      </p:sp>
+      <p:sp>
+        <p:nvSpPr>
+          <p:cNvPr id="26" name="Shape 23"/>
+          <p:cNvSpPr/>
+          <p:nvPr/>
+        </p:nvSpPr>
+        <p:spPr>
+          <a:xfrm>
+            <a:off x="3154680" y="3035808"/>
+            <a:ext cx="1645920" cy="274320"/>
+          </a:xfrm>
+          <a:prstGeom prst="roundRect">
+            <a:avLst>
+              <a:gd name="adj" fmla="val 50000"/>
+            </a:avLst>
+          </a:prstGeom>
+          <a:solidFill>
+            <a:srgbClr val="6D5AA6"/>
+          </a:solidFill>
+          <a:ln w="12700">
             <a:solidFill>
               <a:srgbClr val="6D5AA6"/>
             </a:solidFill>
@@ -4515,14 +4824,117 @@
       </p:sp>
       <p:sp>
         <p:nvSpPr>
-          <p:cNvPr id="19" name="Text 16"/>
-          <p:cNvSpPr/>
-          <p:nvPr/>
-        </p:nvSpPr>
-        <p:spPr>
-          <a:xfrm>
-            <a:off x="4261104" y="1874520"/>
-            <a:ext cx="1737360" cy="411480"/>
+          <p:cNvPr id="27" name="Text 24"/>
+          <p:cNvSpPr/>
+          <p:nvPr/>
+        </p:nvSpPr>
+        <p:spPr>
+          <a:xfrm>
+            <a:off x="3154680" y="3035808"/>
+            <a:ext cx="1645920" cy="274320"/>
+          </a:xfrm>
+          <a:prstGeom prst="rect">
+            <a:avLst/>
+          </a:prstGeom>
+          <a:noFill/>
+          <a:ln/>
+        </p:spPr>
+        <p:txBody>
+          <a:bodyPr wrap="square" lIns="0" tIns="0" rIns="0" bIns="0" rtlCol="0" anchor="ctr"/>
+          <a:lstStyle/>
+          <a:p>
+            <a:pPr algn="ctr" indent="0" marL="0">
+              <a:buNone/>
+            </a:pPr>
+            <a:r>
+              <a:rPr lang="en-US" sz="1000" b="1" dirty="0">
+                <a:solidFill>
+                  <a:srgbClr val="FFFFFF"/>
+                </a:solidFill>
+                <a:latin typeface="맑은 고딕" pitchFamily="34" charset="0"/>
+                <a:ea typeface="맑은 고딕" pitchFamily="34" charset="-122"/>
+                <a:cs typeface="맑은 고딕" pitchFamily="34" charset="-120"/>
+              </a:rPr>
+              <a:t>관리망 1 · 원격접속</a:t>
+            </a:r>
+            <a:endParaRPr lang="en-US" sz="1000" dirty="0"/>
+          </a:p>
+        </p:txBody>
+      </p:sp>
+      <p:sp>
+        <p:nvSpPr>
+          <p:cNvPr id="28" name="Text 25"/>
+          <p:cNvSpPr/>
+          <p:nvPr/>
+        </p:nvSpPr>
+        <p:spPr>
+          <a:xfrm>
+            <a:off x="5212080" y="2935224"/>
+            <a:ext cx="640080" cy="475488"/>
+          </a:xfrm>
+          <a:prstGeom prst="rect">
+            <a:avLst/>
+          </a:prstGeom>
+          <a:noFill/>
+          <a:ln/>
+        </p:spPr>
+        <p:txBody>
+          <a:bodyPr wrap="square" lIns="0" tIns="0" rIns="0" bIns="0" rtlCol="0" anchor="ctr"/>
+          <a:lstStyle/>
+          <a:p>
+            <a:pPr algn="ctr" indent="0" marL="0">
+              <a:buNone/>
+            </a:pPr>
+            <a:r>
+              <a:rPr lang="en-US" sz="1600" b="1" dirty="0">
+                <a:solidFill>
+                  <a:srgbClr val="1E3A5F"/>
+                </a:solidFill>
+                <a:latin typeface="맑은 고딕" pitchFamily="34" charset="0"/>
+                <a:ea typeface="맑은 고딕" pitchFamily="34" charset="-122"/>
+                <a:cs typeface="맑은 고딕" pitchFamily="34" charset="-120"/>
+              </a:rPr>
+              <a:t>1</a:t>
+            </a:r>
+            <a:endParaRPr lang="en-US" sz="1600" dirty="0"/>
+          </a:p>
+        </p:txBody>
+      </p:sp>
+      <p:sp>
+        <p:nvSpPr>
+          <p:cNvPr id="29" name="Shape 26"/>
+          <p:cNvSpPr/>
+          <p:nvPr/>
+        </p:nvSpPr>
+        <p:spPr>
+          <a:xfrm>
+            <a:off x="457200" y="3447288"/>
+            <a:ext cx="5532120" cy="475488"/>
+          </a:xfrm>
+          <a:prstGeom prst="rect">
+            <a:avLst/>
+          </a:prstGeom>
+          <a:solidFill>
+            <a:srgbClr val="FFFFFF"/>
+          </a:solidFill>
+          <a:ln w="9525">
+            <a:solidFill>
+              <a:srgbClr val="CBD5E1"/>
+            </a:solidFill>
+            <a:prstDash val="solid"/>
+          </a:ln>
+        </p:spPr>
+      </p:sp>
+      <p:sp>
+        <p:nvSpPr>
+          <p:cNvPr id="30" name="Text 27"/>
+          <p:cNvSpPr/>
+          <p:nvPr/>
+        </p:nvSpPr>
+        <p:spPr>
+          <a:xfrm>
+            <a:off x="731520" y="3483864"/>
+            <a:ext cx="2377440" cy="228600"/>
           </a:xfrm>
           <a:prstGeom prst="rect">
             <a:avLst/>
@@ -4534,34 +4946,34 @@
           <a:bodyPr wrap="square" lIns="0" tIns="0" rIns="0" bIns="0" rtlCol="0" anchor="t"/>
           <a:lstStyle/>
           <a:p>
-            <a:pPr algn="ctr" indent="0" marL="0">
-              <a:buNone/>
-            </a:pPr>
-            <a:r>
-              <a:rPr lang="en-US" sz="2200" b="1" dirty="0">
-                <a:solidFill>
-                  <a:srgbClr val="6D5AA6"/>
-                </a:solidFill>
-                <a:latin typeface="맑은 고딕" pitchFamily="34" charset="0"/>
-                <a:ea typeface="맑은 고딕" pitchFamily="34" charset="-122"/>
-                <a:cs typeface="맑은 고딕" pitchFamily="34" charset="-120"/>
-              </a:rPr>
-              <a:t>3</a:t>
-            </a:r>
-            <a:endParaRPr lang="en-US" sz="2200" dirty="0"/>
-          </a:p>
-        </p:txBody>
-      </p:sp>
-      <p:sp>
-        <p:nvSpPr>
-          <p:cNvPr id="20" name="Text 17"/>
-          <p:cNvSpPr/>
-          <p:nvPr/>
-        </p:nvSpPr>
-        <p:spPr>
-          <a:xfrm>
-            <a:off x="4306824" y="2331720"/>
-            <a:ext cx="1645920" cy="411480"/>
+            <a:pPr indent="0" marL="0">
+              <a:buNone/>
+            </a:pPr>
+            <a:r>
+              <a:rPr lang="en-US" sz="1200" b="1" dirty="0">
+                <a:solidFill>
+                  <a:srgbClr val="1F2A3A"/>
+                </a:solidFill>
+                <a:latin typeface="맑은 고딕" pitchFamily="34" charset="0"/>
+                <a:ea typeface="맑은 고딕" pitchFamily="34" charset="-122"/>
+                <a:cs typeface="맑은 고딕" pitchFamily="34" charset="-120"/>
+              </a:rPr>
+              <a:t>└ master-1·2·3</a:t>
+            </a:r>
+            <a:endParaRPr lang="en-US" sz="1200" dirty="0"/>
+          </a:p>
+        </p:txBody>
+      </p:sp>
+      <p:sp>
+        <p:nvSpPr>
+          <p:cNvPr id="31" name="Text 28"/>
+          <p:cNvSpPr/>
+          <p:nvPr/>
+        </p:nvSpPr>
+        <p:spPr>
+          <a:xfrm>
+            <a:off x="960120" y="3703320"/>
+            <a:ext cx="2514600" cy="201168"/>
           </a:xfrm>
           <a:prstGeom prst="rect">
             <a:avLst/>
@@ -4573,83 +4985,44 @@
           <a:bodyPr wrap="square" lIns="0" tIns="0" rIns="0" bIns="0" rtlCol="0" anchor="t"/>
           <a:lstStyle/>
           <a:p>
-            <a:pPr algn="ctr" indent="0" marL="0">
-              <a:buNone/>
-            </a:pPr>
-            <a:r>
-              <a:rPr lang="en-US" sz="1150" b="1" dirty="0">
-                <a:solidFill>
-                  <a:srgbClr val="1F2A3A"/>
-                </a:solidFill>
-                <a:latin typeface="맑은 고딕" pitchFamily="34" charset="0"/>
-                <a:ea typeface="맑은 고딕" pitchFamily="34" charset="-122"/>
-                <a:cs typeface="맑은 고딕" pitchFamily="34" charset="-120"/>
-              </a:rPr>
-              <a:t>master-1</a:t>
-            </a:r>
-            <a:endParaRPr lang="en-US" sz="1150" dirty="0"/>
-          </a:p>
-        </p:txBody>
-      </p:sp>
-      <p:sp>
-        <p:nvSpPr>
-          <p:cNvPr id="21" name="Text 18"/>
-          <p:cNvSpPr/>
-          <p:nvPr/>
-        </p:nvSpPr>
-        <p:spPr>
-          <a:xfrm>
-            <a:off x="4306824" y="2788920"/>
-            <a:ext cx="1645920" cy="274320"/>
-          </a:xfrm>
-          <a:prstGeom prst="rect">
-            <a:avLst/>
-          </a:prstGeom>
-          <a:noFill/>
-          <a:ln/>
-        </p:spPr>
-        <p:txBody>
-          <a:bodyPr wrap="square" lIns="0" tIns="0" rIns="0" bIns="0" rtlCol="0" anchor="t"/>
-          <a:lstStyle/>
-          <a:p>
-            <a:pPr algn="ctr" indent="0" marL="0">
-              <a:buNone/>
-            </a:pPr>
-            <a:r>
-              <a:rPr lang="en-US" sz="1000" b="1" dirty="0">
-                <a:solidFill>
-                  <a:srgbClr val="6D5AA6"/>
-                </a:solidFill>
-                <a:latin typeface="맑은 고딕" pitchFamily="34" charset="0"/>
-                <a:ea typeface="맑은 고딕" pitchFamily="34" charset="-122"/>
-                <a:cs typeface="맑은 고딕" pitchFamily="34" charset="-120"/>
-              </a:rPr>
-              <a:t>관리망</a:t>
-            </a:r>
-            <a:endParaRPr lang="en-US" sz="1000" dirty="0"/>
-          </a:p>
-        </p:txBody>
-      </p:sp>
-      <p:sp>
-        <p:nvSpPr>
-          <p:cNvPr id="22" name="Shape 19"/>
-          <p:cNvSpPr/>
-          <p:nvPr/>
-        </p:nvSpPr>
-        <p:spPr>
-          <a:xfrm>
-            <a:off x="6163056" y="1783080"/>
-            <a:ext cx="1737360" cy="1417320"/>
+            <a:pPr indent="0" marL="0">
+              <a:buNone/>
+            </a:pPr>
+            <a:r>
+              <a:rPr lang="en-US" sz="900" dirty="0">
+                <a:solidFill>
+                  <a:srgbClr val="64748B"/>
+                </a:solidFill>
+                <a:latin typeface="맑은 고딕" pitchFamily="34" charset="0"/>
+                <a:ea typeface="맑은 고딕" pitchFamily="34" charset="-122"/>
+                <a:cs typeface="맑은 고딕" pitchFamily="34" charset="-120"/>
+              </a:rPr>
+              <a:t>Master VM</a:t>
+            </a:r>
+            <a:endParaRPr lang="en-US" sz="900" dirty="0"/>
+          </a:p>
+        </p:txBody>
+      </p:sp>
+      <p:sp>
+        <p:nvSpPr>
+          <p:cNvPr id="32" name="Shape 29"/>
+          <p:cNvSpPr/>
+          <p:nvPr/>
+        </p:nvSpPr>
+        <p:spPr>
+          <a:xfrm>
+            <a:off x="3154680" y="3547872"/>
+            <a:ext cx="845820" cy="274320"/>
           </a:xfrm>
           <a:prstGeom prst="roundRect">
             <a:avLst>
-              <a:gd name="adj" fmla="val 5161"/>
+              <a:gd name="adj" fmla="val 50000"/>
             </a:avLst>
           </a:prstGeom>
           <a:solidFill>
-            <a:srgbClr val="F5F7FA"/>
+            <a:srgbClr val="6D5AA6"/>
           </a:solidFill>
-          <a:ln w="19050">
+          <a:ln w="12700">
             <a:solidFill>
               <a:srgbClr val="6D5AA6"/>
             </a:solidFill>
@@ -4659,14 +5032,117 @@
       </p:sp>
       <p:sp>
         <p:nvSpPr>
-          <p:cNvPr id="23" name="Text 20"/>
-          <p:cNvSpPr/>
-          <p:nvPr/>
-        </p:nvSpPr>
-        <p:spPr>
-          <a:xfrm>
-            <a:off x="6163056" y="1874520"/>
-            <a:ext cx="1737360" cy="411480"/>
+          <p:cNvPr id="33" name="Text 30"/>
+          <p:cNvSpPr/>
+          <p:nvPr/>
+        </p:nvSpPr>
+        <p:spPr>
+          <a:xfrm>
+            <a:off x="3154680" y="3547872"/>
+            <a:ext cx="845820" cy="274320"/>
+          </a:xfrm>
+          <a:prstGeom prst="rect">
+            <a:avLst/>
+          </a:prstGeom>
+          <a:noFill/>
+          <a:ln/>
+        </p:spPr>
+        <p:txBody>
+          <a:bodyPr wrap="square" lIns="0" tIns="0" rIns="0" bIns="0" rtlCol="0" anchor="ctr"/>
+          <a:lstStyle/>
+          <a:p>
+            <a:pPr algn="ctr" indent="0" marL="0">
+              <a:buNone/>
+            </a:pPr>
+            <a:r>
+              <a:rPr lang="en-US" sz="1000" b="1" dirty="0">
+                <a:solidFill>
+                  <a:srgbClr val="FFFFFF"/>
+                </a:solidFill>
+                <a:latin typeface="맑은 고딕" pitchFamily="34" charset="0"/>
+                <a:ea typeface="맑은 고딕" pitchFamily="34" charset="-122"/>
+                <a:cs typeface="맑은 고딕" pitchFamily="34" charset="-120"/>
+              </a:rPr>
+              <a:t>관리망 3</a:t>
+            </a:r>
+            <a:endParaRPr lang="en-US" sz="1000" dirty="0"/>
+          </a:p>
+        </p:txBody>
+      </p:sp>
+      <p:sp>
+        <p:nvSpPr>
+          <p:cNvPr id="34" name="Text 31"/>
+          <p:cNvSpPr/>
+          <p:nvPr/>
+        </p:nvSpPr>
+        <p:spPr>
+          <a:xfrm>
+            <a:off x="5212080" y="3447288"/>
+            <a:ext cx="640080" cy="475488"/>
+          </a:xfrm>
+          <a:prstGeom prst="rect">
+            <a:avLst/>
+          </a:prstGeom>
+          <a:noFill/>
+          <a:ln/>
+        </p:spPr>
+        <p:txBody>
+          <a:bodyPr wrap="square" lIns="0" tIns="0" rIns="0" bIns="0" rtlCol="0" anchor="ctr"/>
+          <a:lstStyle/>
+          <a:p>
+            <a:pPr algn="ctr" indent="0" marL="0">
+              <a:buNone/>
+            </a:pPr>
+            <a:r>
+              <a:rPr lang="en-US" sz="1600" b="1" dirty="0">
+                <a:solidFill>
+                  <a:srgbClr val="1E3A5F"/>
+                </a:solidFill>
+                <a:latin typeface="맑은 고딕" pitchFamily="34" charset="0"/>
+                <a:ea typeface="맑은 고딕" pitchFamily="34" charset="-122"/>
+                <a:cs typeface="맑은 고딕" pitchFamily="34" charset="-120"/>
+              </a:rPr>
+              <a:t>3</a:t>
+            </a:r>
+            <a:endParaRPr lang="en-US" sz="1600" dirty="0"/>
+          </a:p>
+        </p:txBody>
+      </p:sp>
+      <p:sp>
+        <p:nvSpPr>
+          <p:cNvPr id="35" name="Shape 32"/>
+          <p:cNvSpPr/>
+          <p:nvPr/>
+        </p:nvSpPr>
+        <p:spPr>
+          <a:xfrm>
+            <a:off x="457200" y="3959352"/>
+            <a:ext cx="5532120" cy="475488"/>
+          </a:xfrm>
+          <a:prstGeom prst="rect">
+            <a:avLst/>
+          </a:prstGeom>
+          <a:solidFill>
+            <a:srgbClr val="FFFFFF"/>
+          </a:solidFill>
+          <a:ln w="9525">
+            <a:solidFill>
+              <a:srgbClr val="CBD5E1"/>
+            </a:solidFill>
+            <a:prstDash val="dash"/>
+          </a:ln>
+        </p:spPr>
+      </p:sp>
+      <p:sp>
+        <p:nvSpPr>
+          <p:cNvPr id="36" name="Text 33"/>
+          <p:cNvSpPr/>
+          <p:nvPr/>
+        </p:nvSpPr>
+        <p:spPr>
+          <a:xfrm>
+            <a:off x="731520" y="3995928"/>
+            <a:ext cx="2377440" cy="228600"/>
           </a:xfrm>
           <a:prstGeom prst="rect">
             <a:avLst/>
@@ -4678,34 +5154,34 @@
           <a:bodyPr wrap="square" lIns="0" tIns="0" rIns="0" bIns="0" rtlCol="0" anchor="t"/>
           <a:lstStyle/>
           <a:p>
-            <a:pPr algn="ctr" indent="0" marL="0">
-              <a:buNone/>
-            </a:pPr>
-            <a:r>
-              <a:rPr lang="en-US" sz="2200" b="1" dirty="0">
-                <a:solidFill>
-                  <a:srgbClr val="6D5AA6"/>
-                </a:solidFill>
-                <a:latin typeface="맑은 고딕" pitchFamily="34" charset="0"/>
-                <a:ea typeface="맑은 고딕" pitchFamily="34" charset="-122"/>
-                <a:cs typeface="맑은 고딕" pitchFamily="34" charset="-120"/>
-              </a:rPr>
-              <a:t>4</a:t>
-            </a:r>
-            <a:endParaRPr lang="en-US" sz="2200" dirty="0"/>
-          </a:p>
-        </p:txBody>
-      </p:sp>
-      <p:sp>
-        <p:nvSpPr>
-          <p:cNvPr id="24" name="Text 21"/>
-          <p:cNvSpPr/>
-          <p:nvPr/>
-        </p:nvSpPr>
-        <p:spPr>
-          <a:xfrm>
-            <a:off x="6208776" y="2331720"/>
-            <a:ext cx="1645920" cy="411480"/>
+            <a:pPr indent="0" marL="0">
+              <a:buNone/>
+            </a:pPr>
+            <a:r>
+              <a:rPr lang="en-US" sz="1200" b="1" dirty="0">
+                <a:solidFill>
+                  <a:srgbClr val="1F2A3A"/>
+                </a:solidFill>
+                <a:latin typeface="맑은 고딕" pitchFamily="34" charset="0"/>
+                <a:ea typeface="맑은 고딕" pitchFamily="34" charset="-122"/>
+                <a:cs typeface="맑은 고딕" pitchFamily="34" charset="-120"/>
+              </a:rPr>
+              <a:t>└ bootstrap</a:t>
+            </a:r>
+            <a:endParaRPr lang="en-US" sz="1200" dirty="0"/>
+          </a:p>
+        </p:txBody>
+      </p:sp>
+      <p:sp>
+        <p:nvSpPr>
+          <p:cNvPr id="37" name="Text 34"/>
+          <p:cNvSpPr/>
+          <p:nvPr/>
+        </p:nvSpPr>
+        <p:spPr>
+          <a:xfrm>
+            <a:off x="960120" y="4215384"/>
+            <a:ext cx="2514600" cy="201168"/>
           </a:xfrm>
           <a:prstGeom prst="rect">
             <a:avLst/>
@@ -4717,83 +5193,44 @@
           <a:bodyPr wrap="square" lIns="0" tIns="0" rIns="0" bIns="0" rtlCol="0" anchor="t"/>
           <a:lstStyle/>
           <a:p>
-            <a:pPr algn="ctr" indent="0" marL="0">
-              <a:buNone/>
-            </a:pPr>
-            <a:r>
-              <a:rPr lang="en-US" sz="1150" b="1" dirty="0">
-                <a:solidFill>
-                  <a:srgbClr val="1F2A3A"/>
-                </a:solidFill>
-                <a:latin typeface="맑은 고딕" pitchFamily="34" charset="0"/>
-                <a:ea typeface="맑은 고딕" pitchFamily="34" charset="-122"/>
-                <a:cs typeface="맑은 고딕" pitchFamily="34" charset="-120"/>
-              </a:rPr>
-              <a:t>master-2</a:t>
-            </a:r>
-            <a:endParaRPr lang="en-US" sz="1150" dirty="0"/>
-          </a:p>
-        </p:txBody>
-      </p:sp>
-      <p:sp>
-        <p:nvSpPr>
-          <p:cNvPr id="25" name="Text 22"/>
-          <p:cNvSpPr/>
-          <p:nvPr/>
-        </p:nvSpPr>
-        <p:spPr>
-          <a:xfrm>
-            <a:off x="6208776" y="2788920"/>
-            <a:ext cx="1645920" cy="274320"/>
-          </a:xfrm>
-          <a:prstGeom prst="rect">
-            <a:avLst/>
-          </a:prstGeom>
-          <a:noFill/>
-          <a:ln/>
-        </p:spPr>
-        <p:txBody>
-          <a:bodyPr wrap="square" lIns="0" tIns="0" rIns="0" bIns="0" rtlCol="0" anchor="t"/>
-          <a:lstStyle/>
-          <a:p>
-            <a:pPr algn="ctr" indent="0" marL="0">
-              <a:buNone/>
-            </a:pPr>
-            <a:r>
-              <a:rPr lang="en-US" sz="1000" b="1" dirty="0">
-                <a:solidFill>
-                  <a:srgbClr val="6D5AA6"/>
-                </a:solidFill>
-                <a:latin typeface="맑은 고딕" pitchFamily="34" charset="0"/>
-                <a:ea typeface="맑은 고딕" pitchFamily="34" charset="-122"/>
-                <a:cs typeface="맑은 고딕" pitchFamily="34" charset="-120"/>
-              </a:rPr>
-              <a:t>관리망</a:t>
-            </a:r>
-            <a:endParaRPr lang="en-US" sz="1000" dirty="0"/>
-          </a:p>
-        </p:txBody>
-      </p:sp>
-      <p:sp>
-        <p:nvSpPr>
-          <p:cNvPr id="26" name="Shape 23"/>
-          <p:cNvSpPr/>
-          <p:nvPr/>
-        </p:nvSpPr>
-        <p:spPr>
-          <a:xfrm>
-            <a:off x="8065008" y="1783080"/>
-            <a:ext cx="1737360" cy="1417320"/>
+            <a:pPr indent="0" marL="0">
+              <a:buNone/>
+            </a:pPr>
+            <a:r>
+              <a:rPr lang="en-US" sz="900" dirty="0">
+                <a:solidFill>
+                  <a:srgbClr val="64748B"/>
+                </a:solidFill>
+                <a:latin typeface="맑은 고딕" pitchFamily="34" charset="0"/>
+                <a:ea typeface="맑은 고딕" pitchFamily="34" charset="-122"/>
+                <a:cs typeface="맑은 고딕" pitchFamily="34" charset="-120"/>
+              </a:rPr>
+              <a:t>임시 VM · master 구성 후 반납</a:t>
+            </a:r>
+            <a:endParaRPr lang="en-US" sz="900" dirty="0"/>
+          </a:p>
+        </p:txBody>
+      </p:sp>
+      <p:sp>
+        <p:nvSpPr>
+          <p:cNvPr id="38" name="Shape 35"/>
+          <p:cNvSpPr/>
+          <p:nvPr/>
+        </p:nvSpPr>
+        <p:spPr>
+          <a:xfrm>
+            <a:off x="3154680" y="4059936"/>
+            <a:ext cx="845820" cy="274320"/>
           </a:xfrm>
           <a:prstGeom prst="roundRect">
             <a:avLst>
-              <a:gd name="adj" fmla="val 5161"/>
+              <a:gd name="adj" fmla="val 50000"/>
             </a:avLst>
           </a:prstGeom>
           <a:solidFill>
-            <a:srgbClr val="F5F7FA"/>
+            <a:srgbClr val="6D5AA6"/>
           </a:solidFill>
-          <a:ln w="19050">
+          <a:ln w="12700">
             <a:solidFill>
               <a:srgbClr val="6D5AA6"/>
             </a:solidFill>
@@ -4803,285 +5240,100 @@
       </p:sp>
       <p:sp>
         <p:nvSpPr>
-          <p:cNvPr id="27" name="Text 24"/>
-          <p:cNvSpPr/>
-          <p:nvPr/>
-        </p:nvSpPr>
-        <p:spPr>
-          <a:xfrm>
-            <a:off x="8065008" y="1874520"/>
-            <a:ext cx="1737360" cy="411480"/>
-          </a:xfrm>
-          <a:prstGeom prst="rect">
-            <a:avLst/>
-          </a:prstGeom>
-          <a:noFill/>
-          <a:ln/>
-        </p:spPr>
-        <p:txBody>
-          <a:bodyPr wrap="square" lIns="0" tIns="0" rIns="0" bIns="0" rtlCol="0" anchor="t"/>
+          <p:cNvPr id="39" name="Text 36"/>
+          <p:cNvSpPr/>
+          <p:nvPr/>
+        </p:nvSpPr>
+        <p:spPr>
+          <a:xfrm>
+            <a:off x="3154680" y="4059936"/>
+            <a:ext cx="845820" cy="274320"/>
+          </a:xfrm>
+          <a:prstGeom prst="rect">
+            <a:avLst/>
+          </a:prstGeom>
+          <a:noFill/>
+          <a:ln/>
+        </p:spPr>
+        <p:txBody>
+          <a:bodyPr wrap="square" lIns="0" tIns="0" rIns="0" bIns="0" rtlCol="0" anchor="ctr"/>
           <a:lstStyle/>
           <a:p>
             <a:pPr algn="ctr" indent="0" marL="0">
               <a:buNone/>
             </a:pPr>
             <a:r>
-              <a:rPr lang="en-US" sz="2200" b="1" dirty="0">
-                <a:solidFill>
-                  <a:srgbClr val="6D5AA6"/>
-                </a:solidFill>
-                <a:latin typeface="맑은 고딕" pitchFamily="34" charset="0"/>
-                <a:ea typeface="맑은 고딕" pitchFamily="34" charset="-122"/>
-                <a:cs typeface="맑은 고딕" pitchFamily="34" charset="-120"/>
-              </a:rPr>
-              <a:t>5</a:t>
-            </a:r>
-            <a:endParaRPr lang="en-US" sz="2200" dirty="0"/>
-          </a:p>
-        </p:txBody>
-      </p:sp>
-      <p:sp>
-        <p:nvSpPr>
-          <p:cNvPr id="28" name="Text 25"/>
-          <p:cNvSpPr/>
-          <p:nvPr/>
-        </p:nvSpPr>
-        <p:spPr>
-          <a:xfrm>
-            <a:off x="8110728" y="2331720"/>
-            <a:ext cx="1645920" cy="411480"/>
-          </a:xfrm>
-          <a:prstGeom prst="rect">
-            <a:avLst/>
-          </a:prstGeom>
-          <a:noFill/>
-          <a:ln/>
-        </p:spPr>
-        <p:txBody>
-          <a:bodyPr wrap="square" lIns="0" tIns="0" rIns="0" bIns="0" rtlCol="0" anchor="t"/>
+              <a:rPr lang="en-US" sz="1000" b="1" dirty="0">
+                <a:solidFill>
+                  <a:srgbClr val="FFFFFF"/>
+                </a:solidFill>
+                <a:latin typeface="맑은 고딕" pitchFamily="34" charset="0"/>
+                <a:ea typeface="맑은 고딕" pitchFamily="34" charset="-122"/>
+                <a:cs typeface="맑은 고딕" pitchFamily="34" charset="-120"/>
+              </a:rPr>
+              <a:t>관리망 1</a:t>
+            </a:r>
+            <a:endParaRPr lang="en-US" sz="1000" dirty="0"/>
+          </a:p>
+        </p:txBody>
+      </p:sp>
+      <p:sp>
+        <p:nvSpPr>
+          <p:cNvPr id="40" name="Text 37"/>
+          <p:cNvSpPr/>
+          <p:nvPr/>
+        </p:nvSpPr>
+        <p:spPr>
+          <a:xfrm>
+            <a:off x="5212080" y="3959352"/>
+            <a:ext cx="640080" cy="475488"/>
+          </a:xfrm>
+          <a:prstGeom prst="rect">
+            <a:avLst/>
+          </a:prstGeom>
+          <a:noFill/>
+          <a:ln/>
+        </p:spPr>
+        <p:txBody>
+          <a:bodyPr wrap="square" lIns="0" tIns="0" rIns="0" bIns="0" rtlCol="0" anchor="ctr"/>
           <a:lstStyle/>
           <a:p>
             <a:pPr algn="ctr" indent="0" marL="0">
               <a:buNone/>
             </a:pPr>
             <a:r>
-              <a:rPr lang="en-US" sz="1150" b="1" dirty="0">
-                <a:solidFill>
-                  <a:srgbClr val="1F2A3A"/>
-                </a:solidFill>
-                <a:latin typeface="맑은 고딕" pitchFamily="34" charset="0"/>
-                <a:ea typeface="맑은 고딕" pitchFamily="34" charset="-122"/>
-                <a:cs typeface="맑은 고딕" pitchFamily="34" charset="-120"/>
-              </a:rPr>
-              <a:t>master-3</a:t>
-            </a:r>
-            <a:endParaRPr lang="en-US" sz="1150" dirty="0"/>
-          </a:p>
-        </p:txBody>
-      </p:sp>
-      <p:sp>
-        <p:nvSpPr>
-          <p:cNvPr id="29" name="Text 26"/>
-          <p:cNvSpPr/>
-          <p:nvPr/>
-        </p:nvSpPr>
-        <p:spPr>
-          <a:xfrm>
-            <a:off x="8110728" y="2788920"/>
-            <a:ext cx="1645920" cy="274320"/>
-          </a:xfrm>
-          <a:prstGeom prst="rect">
-            <a:avLst/>
-          </a:prstGeom>
-          <a:noFill/>
-          <a:ln/>
-        </p:spPr>
-        <p:txBody>
-          <a:bodyPr wrap="square" lIns="0" tIns="0" rIns="0" bIns="0" rtlCol="0" anchor="t"/>
-          <a:lstStyle/>
-          <a:p>
-            <a:pPr algn="ctr" indent="0" marL="0">
-              <a:buNone/>
-            </a:pPr>
-            <a:r>
-              <a:rPr lang="en-US" sz="1000" b="1" dirty="0">
-                <a:solidFill>
-                  <a:srgbClr val="6D5AA6"/>
-                </a:solidFill>
-                <a:latin typeface="맑은 고딕" pitchFamily="34" charset="0"/>
-                <a:ea typeface="맑은 고딕" pitchFamily="34" charset="-122"/>
-                <a:cs typeface="맑은 고딕" pitchFamily="34" charset="-120"/>
-              </a:rPr>
-              <a:t>관리망</a:t>
-            </a:r>
-            <a:endParaRPr lang="en-US" sz="1000" dirty="0"/>
-          </a:p>
-        </p:txBody>
-      </p:sp>
-      <p:sp>
-        <p:nvSpPr>
-          <p:cNvPr id="30" name="Shape 27"/>
-          <p:cNvSpPr/>
-          <p:nvPr/>
-        </p:nvSpPr>
-        <p:spPr>
-          <a:xfrm>
-            <a:off x="9966960" y="1783080"/>
-            <a:ext cx="1737360" cy="1417320"/>
-          </a:xfrm>
-          <a:prstGeom prst="roundRect">
-            <a:avLst>
-              <a:gd name="adj" fmla="val 5161"/>
-            </a:avLst>
-          </a:prstGeom>
-          <a:solidFill>
-            <a:srgbClr val="FFFFFF"/>
-          </a:solidFill>
-          <a:ln w="19050">
-            <a:solidFill>
-              <a:srgbClr val="6D5AA6"/>
-            </a:solidFill>
-            <a:prstDash val="dash"/>
-          </a:ln>
-        </p:spPr>
-      </p:sp>
-      <p:sp>
-        <p:nvSpPr>
-          <p:cNvPr id="31" name="Text 28"/>
-          <p:cNvSpPr/>
-          <p:nvPr/>
-        </p:nvSpPr>
-        <p:spPr>
-          <a:xfrm>
-            <a:off x="9966960" y="1874520"/>
-            <a:ext cx="1737360" cy="411480"/>
-          </a:xfrm>
-          <a:prstGeom prst="rect">
-            <a:avLst/>
-          </a:prstGeom>
-          <a:noFill/>
-          <a:ln/>
-        </p:spPr>
-        <p:txBody>
-          <a:bodyPr wrap="square" lIns="0" tIns="0" rIns="0" bIns="0" rtlCol="0" anchor="t"/>
-          <a:lstStyle/>
-          <a:p>
-            <a:pPr algn="ctr" indent="0" marL="0">
-              <a:buNone/>
-            </a:pPr>
-            <a:r>
-              <a:rPr lang="en-US" sz="2200" b="1" dirty="0">
-                <a:solidFill>
-                  <a:srgbClr val="6D5AA6"/>
-                </a:solidFill>
-                <a:latin typeface="맑은 고딕" pitchFamily="34" charset="0"/>
-                <a:ea typeface="맑은 고딕" pitchFamily="34" charset="-122"/>
-                <a:cs typeface="맑은 고딕" pitchFamily="34" charset="-120"/>
-              </a:rPr>
-              <a:t>6</a:t>
-            </a:r>
-            <a:endParaRPr lang="en-US" sz="2200" dirty="0"/>
-          </a:p>
-        </p:txBody>
-      </p:sp>
-      <p:sp>
-        <p:nvSpPr>
-          <p:cNvPr id="32" name="Text 29"/>
-          <p:cNvSpPr/>
-          <p:nvPr/>
-        </p:nvSpPr>
-        <p:spPr>
-          <a:xfrm>
-            <a:off x="10012680" y="2331720"/>
-            <a:ext cx="1645920" cy="411480"/>
-          </a:xfrm>
-          <a:prstGeom prst="rect">
-            <a:avLst/>
-          </a:prstGeom>
-          <a:noFill/>
-          <a:ln/>
-        </p:spPr>
-        <p:txBody>
-          <a:bodyPr wrap="square" lIns="0" tIns="0" rIns="0" bIns="0" rtlCol="0" anchor="t"/>
-          <a:lstStyle/>
-          <a:p>
-            <a:pPr algn="ctr" indent="0" marL="0">
-              <a:buNone/>
-            </a:pPr>
-            <a:r>
-              <a:rPr lang="en-US" sz="1150" b="1" dirty="0">
-                <a:solidFill>
-                  <a:srgbClr val="1F2A3A"/>
-                </a:solidFill>
-                <a:latin typeface="맑은 고딕" pitchFamily="34" charset="0"/>
-                <a:ea typeface="맑은 고딕" pitchFamily="34" charset="-122"/>
-                <a:cs typeface="맑은 고딕" pitchFamily="34" charset="-120"/>
-              </a:rPr>
-              <a:t>bootstrap (임시)</a:t>
-            </a:r>
-            <a:endParaRPr lang="en-US" sz="1150" dirty="0"/>
-          </a:p>
-        </p:txBody>
-      </p:sp>
-      <p:sp>
-        <p:nvSpPr>
-          <p:cNvPr id="33" name="Text 30"/>
-          <p:cNvSpPr/>
-          <p:nvPr/>
-        </p:nvSpPr>
-        <p:spPr>
-          <a:xfrm>
-            <a:off x="10012680" y="2788920"/>
-            <a:ext cx="1645920" cy="274320"/>
-          </a:xfrm>
-          <a:prstGeom prst="rect">
-            <a:avLst/>
-          </a:prstGeom>
-          <a:noFill/>
-          <a:ln/>
-        </p:spPr>
-        <p:txBody>
-          <a:bodyPr wrap="square" lIns="0" tIns="0" rIns="0" bIns="0" rtlCol="0" anchor="t"/>
-          <a:lstStyle/>
-          <a:p>
-            <a:pPr algn="ctr" indent="0" marL="0">
-              <a:buNone/>
-            </a:pPr>
-            <a:r>
-              <a:rPr lang="en-US" sz="1000" b="1" dirty="0">
-                <a:solidFill>
-                  <a:srgbClr val="6D5AA6"/>
-                </a:solidFill>
-                <a:latin typeface="맑은 고딕" pitchFamily="34" charset="0"/>
-                <a:ea typeface="맑은 고딕" pitchFamily="34" charset="-122"/>
-                <a:cs typeface="맑은 고딕" pitchFamily="34" charset="-120"/>
-              </a:rPr>
-              <a:t>관리망 · 반납</a:t>
-            </a:r>
-            <a:endParaRPr lang="en-US" sz="1000" dirty="0"/>
-          </a:p>
-        </p:txBody>
-      </p:sp>
-      <p:sp>
-        <p:nvSpPr>
-          <p:cNvPr id="34" name="Shape 31"/>
-          <p:cNvSpPr/>
-          <p:nvPr/>
-        </p:nvSpPr>
-        <p:spPr>
-          <a:xfrm>
-            <a:off x="457200" y="3429000"/>
-            <a:ext cx="6949440" cy="1234440"/>
-          </a:xfrm>
-          <a:prstGeom prst="roundRect">
-            <a:avLst>
-              <a:gd name="adj" fmla="val 5926"/>
-            </a:avLst>
+              <a:rPr lang="en-US" sz="1600" b="1" dirty="0">
+                <a:solidFill>
+                  <a:srgbClr val="1E3A5F"/>
+                </a:solidFill>
+                <a:latin typeface="맑은 고딕" pitchFamily="34" charset="0"/>
+                <a:ea typeface="맑은 고딕" pitchFamily="34" charset="-122"/>
+                <a:cs typeface="맑은 고딕" pitchFamily="34" charset="-120"/>
+              </a:rPr>
+              <a:t>1</a:t>
+            </a:r>
+            <a:endParaRPr lang="en-US" sz="1600" dirty="0"/>
+          </a:p>
+        </p:txBody>
+      </p:sp>
+      <p:sp>
+        <p:nvSpPr>
+          <p:cNvPr id="41" name="Shape 38"/>
+          <p:cNvSpPr/>
+          <p:nvPr/>
+        </p:nvSpPr>
+        <p:spPr>
+          <a:xfrm>
+            <a:off x="457200" y="4471416"/>
+            <a:ext cx="5532120" cy="475488"/>
+          </a:xfrm>
+          <a:prstGeom prst="rect">
+            <a:avLst/>
           </a:prstGeom>
           <a:solidFill>
             <a:srgbClr val="F5F7FA"/>
           </a:solidFill>
-          <a:ln w="12700">
+          <a:ln w="9525">
             <a:solidFill>
               <a:srgbClr val="CBD5E1"/>
             </a:solidFill>
@@ -5091,14 +5343,14 @@
       </p:sp>
       <p:sp>
         <p:nvSpPr>
-          <p:cNvPr id="35" name="Text 32"/>
-          <p:cNvSpPr/>
-          <p:nvPr/>
-        </p:nvSpPr>
-        <p:spPr>
-          <a:xfrm>
-            <a:off x="566928" y="3520440"/>
-            <a:ext cx="6729984" cy="292608"/>
+          <p:cNvPr id="42" name="Text 39"/>
+          <p:cNvSpPr/>
+          <p:nvPr/>
+        </p:nvSpPr>
+        <p:spPr>
+          <a:xfrm>
+            <a:off x="594360" y="4507992"/>
+            <a:ext cx="2377440" cy="228600"/>
           </a:xfrm>
           <a:prstGeom prst="rect">
             <a:avLst/>
@@ -5114,30 +5366,30 @@
               <a:buNone/>
             </a:pPr>
             <a:r>
-              <a:rPr lang="en-US" sz="1400" b="1" dirty="0">
-                <a:solidFill>
-                  <a:srgbClr val="1E3A5F"/>
-                </a:solidFill>
-                <a:latin typeface="맑은 고딕" pitchFamily="34" charset="0"/>
-                <a:ea typeface="맑은 고딕" pitchFamily="34" charset="-122"/>
-                <a:cs typeface="맑은 고딕" pitchFamily="34" charset="-120"/>
-              </a:rPr>
-              <a:t>bootstrap IP</a:t>
-            </a:r>
-            <a:endParaRPr lang="en-US" sz="1400" dirty="0"/>
-          </a:p>
-        </p:txBody>
-      </p:sp>
-      <p:sp>
-        <p:nvSpPr>
-          <p:cNvPr id="36" name="Text 33"/>
-          <p:cNvSpPr/>
-          <p:nvPr/>
-        </p:nvSpPr>
-        <p:spPr>
-          <a:xfrm>
-            <a:off x="566928" y="3840480"/>
-            <a:ext cx="6729984" cy="777240"/>
+              <a:rPr lang="en-US" sz="1200" b="1" dirty="0">
+                <a:solidFill>
+                  <a:srgbClr val="1F2A3A"/>
+                </a:solidFill>
+                <a:latin typeface="맑은 고딕" pitchFamily="34" charset="0"/>
+                <a:ea typeface="맑은 고딕" pitchFamily="34" charset="-122"/>
+                <a:cs typeface="맑은 고딕" pitchFamily="34" charset="-120"/>
+              </a:rPr>
+              <a:t>Worker1</a:t>
+            </a:r>
+            <a:endParaRPr lang="en-US" sz="1200" dirty="0"/>
+          </a:p>
+        </p:txBody>
+      </p:sp>
+      <p:sp>
+        <p:nvSpPr>
+          <p:cNvPr id="43" name="Text 40"/>
+          <p:cNvSpPr/>
+          <p:nvPr/>
+        </p:nvSpPr>
+        <p:spPr>
+          <a:xfrm>
+            <a:off x="594360" y="4727448"/>
+            <a:ext cx="2514600" cy="201168"/>
           </a:xfrm>
           <a:prstGeom prst="rect">
             <a:avLst/>
@@ -5150,13 +5402,49 @@
           <a:lstStyle/>
           <a:p>
             <a:pPr indent="0" marL="0">
-              <a:spcAft>
-                <a:spcPts val="200"/>
-              </a:spcAft>
-              <a:buNone/>
-            </a:pPr>
-            <a:r>
-              <a:rPr lang="en-US" sz="1200" dirty="0">
+              <a:buNone/>
+            </a:pPr>
+            <a:r>
+              <a:rPr lang="en-US" sz="900" dirty="0">
+                <a:solidFill>
+                  <a:srgbClr val="64748B"/>
+                </a:solidFill>
+                <a:latin typeface="맑은 고딕" pitchFamily="34" charset="0"/>
+                <a:ea typeface="맑은 고딕" pitchFamily="34" charset="-122"/>
+                <a:cs typeface="맑은 고딕" pitchFamily="34" charset="-120"/>
+              </a:rPr>
+              <a:t>기존 HV#02 재구성</a:t>
+            </a:r>
+            <a:endParaRPr lang="en-US" sz="900" dirty="0"/>
+          </a:p>
+        </p:txBody>
+      </p:sp>
+      <p:sp>
+        <p:nvSpPr>
+          <p:cNvPr id="44" name="Text 41"/>
+          <p:cNvSpPr/>
+          <p:nvPr/>
+        </p:nvSpPr>
+        <p:spPr>
+          <a:xfrm>
+            <a:off x="3154680" y="4471416"/>
+            <a:ext cx="2057400" cy="475488"/>
+          </a:xfrm>
+          <a:prstGeom prst="rect">
+            <a:avLst/>
+          </a:prstGeom>
+          <a:noFill/>
+          <a:ln/>
+        </p:spPr>
+        <p:txBody>
+          <a:bodyPr wrap="square" lIns="0" tIns="0" rIns="0" bIns="0" rtlCol="0" anchor="ctr"/>
+          <a:lstStyle/>
+          <a:p>
+            <a:pPr indent="0" marL="0">
+              <a:buNone/>
+            </a:pPr>
+            <a:r>
+              <a:rPr lang="en-US" sz="1050" dirty="0">
                 <a:solidFill>
                   <a:srgbClr val="334155"/>
                 </a:solidFill>
@@ -5164,7 +5452,46 @@
                 <a:ea typeface="맑은 고딕" pitchFamily="34" charset="-122"/>
                 <a:cs typeface="맑은 고딕" pitchFamily="34" charset="-120"/>
               </a:rPr>
-              <a:t>master 구성 완료 후 반납 · 상시 사용 IP는 망별 5개</a:t>
+              <a:t>기존 HV IP 재사용</a:t>
+            </a:r>
+            <a:endParaRPr lang="en-US" sz="1050" dirty="0"/>
+          </a:p>
+        </p:txBody>
+      </p:sp>
+      <p:sp>
+        <p:nvSpPr>
+          <p:cNvPr id="45" name="Text 42"/>
+          <p:cNvSpPr/>
+          <p:nvPr/>
+        </p:nvSpPr>
+        <p:spPr>
+          <a:xfrm>
+            <a:off x="5212080" y="4471416"/>
+            <a:ext cx="640080" cy="475488"/>
+          </a:xfrm>
+          <a:prstGeom prst="rect">
+            <a:avLst/>
+          </a:prstGeom>
+          <a:noFill/>
+          <a:ln/>
+        </p:spPr>
+        <p:txBody>
+          <a:bodyPr wrap="square" lIns="0" tIns="0" rIns="0" bIns="0" rtlCol="0" anchor="ctr"/>
+          <a:lstStyle/>
+          <a:p>
+            <a:pPr algn="ctr" indent="0" marL="0">
+              <a:buNone/>
+            </a:pPr>
+            <a:r>
+              <a:rPr lang="en-US" sz="1200" b="1" dirty="0">
+                <a:solidFill>
+                  <a:srgbClr val="64748B"/>
+                </a:solidFill>
+                <a:latin typeface="맑은 고딕" pitchFamily="34" charset="0"/>
+                <a:ea typeface="맑은 고딕" pitchFamily="34" charset="-122"/>
+                <a:cs typeface="맑은 고딕" pitchFamily="34" charset="-120"/>
+              </a:rPr>
+              <a:t>—</a:t>
             </a:r>
             <a:endParaRPr lang="en-US" sz="1200" dirty="0"/>
           </a:p>
@@ -5172,26 +5499,207 @@
       </p:sp>
       <p:sp>
         <p:nvSpPr>
-          <p:cNvPr id="37" name="Shape 34"/>
-          <p:cNvSpPr/>
-          <p:nvPr/>
-        </p:nvSpPr>
-        <p:spPr>
-          <a:xfrm>
-            <a:off x="7589520" y="3429000"/>
-            <a:ext cx="4142232" cy="1234440"/>
+          <p:cNvPr id="46" name="Shape 43"/>
+          <p:cNvSpPr/>
+          <p:nvPr/>
+        </p:nvSpPr>
+        <p:spPr>
+          <a:xfrm>
+            <a:off x="457200" y="4983480"/>
+            <a:ext cx="5532120" cy="475488"/>
+          </a:xfrm>
+          <a:prstGeom prst="rect">
+            <a:avLst/>
+          </a:prstGeom>
+          <a:solidFill>
+            <a:srgbClr val="F5F7FA"/>
+          </a:solidFill>
+          <a:ln w="9525">
+            <a:solidFill>
+              <a:srgbClr val="CBD5E1"/>
+            </a:solidFill>
+            <a:prstDash val="solid"/>
+          </a:ln>
+        </p:spPr>
+      </p:sp>
+      <p:sp>
+        <p:nvSpPr>
+          <p:cNvPr id="47" name="Text 44"/>
+          <p:cNvSpPr/>
+          <p:nvPr/>
+        </p:nvSpPr>
+        <p:spPr>
+          <a:xfrm>
+            <a:off x="594360" y="5020056"/>
+            <a:ext cx="2377440" cy="228600"/>
+          </a:xfrm>
+          <a:prstGeom prst="rect">
+            <a:avLst/>
+          </a:prstGeom>
+          <a:noFill/>
+          <a:ln/>
+        </p:spPr>
+        <p:txBody>
+          <a:bodyPr wrap="square" lIns="0" tIns="0" rIns="0" bIns="0" rtlCol="0" anchor="t"/>
+          <a:lstStyle/>
+          <a:p>
+            <a:pPr indent="0" marL="0">
+              <a:buNone/>
+            </a:pPr>
+            <a:r>
+              <a:rPr lang="en-US" sz="1200" b="1" dirty="0">
+                <a:solidFill>
+                  <a:srgbClr val="1F2A3A"/>
+                </a:solidFill>
+                <a:latin typeface="맑은 고딕" pitchFamily="34" charset="0"/>
+                <a:ea typeface="맑은 고딕" pitchFamily="34" charset="-122"/>
+                <a:cs typeface="맑은 고딕" pitchFamily="34" charset="-120"/>
+              </a:rPr>
+              <a:t>Worker2</a:t>
+            </a:r>
+            <a:endParaRPr lang="en-US" sz="1200" dirty="0"/>
+          </a:p>
+        </p:txBody>
+      </p:sp>
+      <p:sp>
+        <p:nvSpPr>
+          <p:cNvPr id="48" name="Text 45"/>
+          <p:cNvSpPr/>
+          <p:nvPr/>
+        </p:nvSpPr>
+        <p:spPr>
+          <a:xfrm>
+            <a:off x="594360" y="5239512"/>
+            <a:ext cx="2514600" cy="201168"/>
+          </a:xfrm>
+          <a:prstGeom prst="rect">
+            <a:avLst/>
+          </a:prstGeom>
+          <a:noFill/>
+          <a:ln/>
+        </p:spPr>
+        <p:txBody>
+          <a:bodyPr wrap="square" lIns="0" tIns="0" rIns="0" bIns="0" rtlCol="0" anchor="t"/>
+          <a:lstStyle/>
+          <a:p>
+            <a:pPr indent="0" marL="0">
+              <a:buNone/>
+            </a:pPr>
+            <a:r>
+              <a:rPr lang="en-US" sz="900" dirty="0">
+                <a:solidFill>
+                  <a:srgbClr val="64748B"/>
+                </a:solidFill>
+                <a:latin typeface="맑은 고딕" pitchFamily="34" charset="0"/>
+                <a:ea typeface="맑은 고딕" pitchFamily="34" charset="-122"/>
+                <a:cs typeface="맑은 고딕" pitchFamily="34" charset="-120"/>
+              </a:rPr>
+              <a:t>기존 HV#01 · MTV 후 재구성</a:t>
+            </a:r>
+            <a:endParaRPr lang="en-US" sz="900" dirty="0"/>
+          </a:p>
+        </p:txBody>
+      </p:sp>
+      <p:sp>
+        <p:nvSpPr>
+          <p:cNvPr id="49" name="Text 46"/>
+          <p:cNvSpPr/>
+          <p:nvPr/>
+        </p:nvSpPr>
+        <p:spPr>
+          <a:xfrm>
+            <a:off x="3154680" y="4983480"/>
+            <a:ext cx="2057400" cy="475488"/>
+          </a:xfrm>
+          <a:prstGeom prst="rect">
+            <a:avLst/>
+          </a:prstGeom>
+          <a:noFill/>
+          <a:ln/>
+        </p:spPr>
+        <p:txBody>
+          <a:bodyPr wrap="square" lIns="0" tIns="0" rIns="0" bIns="0" rtlCol="0" anchor="ctr"/>
+          <a:lstStyle/>
+          <a:p>
+            <a:pPr indent="0" marL="0">
+              <a:buNone/>
+            </a:pPr>
+            <a:r>
+              <a:rPr lang="en-US" sz="1050" dirty="0">
+                <a:solidFill>
+                  <a:srgbClr val="334155"/>
+                </a:solidFill>
+                <a:latin typeface="맑은 고딕" pitchFamily="34" charset="0"/>
+                <a:ea typeface="맑은 고딕" pitchFamily="34" charset="-122"/>
+                <a:cs typeface="맑은 고딕" pitchFamily="34" charset="-120"/>
+              </a:rPr>
+              <a:t>기존 HV IP 재사용</a:t>
+            </a:r>
+            <a:endParaRPr lang="en-US" sz="1050" dirty="0"/>
+          </a:p>
+        </p:txBody>
+      </p:sp>
+      <p:sp>
+        <p:nvSpPr>
+          <p:cNvPr id="50" name="Text 47"/>
+          <p:cNvSpPr/>
+          <p:nvPr/>
+        </p:nvSpPr>
+        <p:spPr>
+          <a:xfrm>
+            <a:off x="5212080" y="4983480"/>
+            <a:ext cx="640080" cy="475488"/>
+          </a:xfrm>
+          <a:prstGeom prst="rect">
+            <a:avLst/>
+          </a:prstGeom>
+          <a:noFill/>
+          <a:ln/>
+        </p:spPr>
+        <p:txBody>
+          <a:bodyPr wrap="square" lIns="0" tIns="0" rIns="0" bIns="0" rtlCol="0" anchor="ctr"/>
+          <a:lstStyle/>
+          <a:p>
+            <a:pPr algn="ctr" indent="0" marL="0">
+              <a:buNone/>
+            </a:pPr>
+            <a:r>
+              <a:rPr lang="en-US" sz="1200" b="1" dirty="0">
+                <a:solidFill>
+                  <a:srgbClr val="64748B"/>
+                </a:solidFill>
+                <a:latin typeface="맑은 고딕" pitchFamily="34" charset="0"/>
+                <a:ea typeface="맑은 고딕" pitchFamily="34" charset="-122"/>
+                <a:cs typeface="맑은 고딕" pitchFamily="34" charset="-120"/>
+              </a:rPr>
+              <a:t>—</a:t>
+            </a:r>
+            <a:endParaRPr lang="en-US" sz="1200" dirty="0"/>
+          </a:p>
+        </p:txBody>
+      </p:sp>
+      <p:sp>
+        <p:nvSpPr>
+          <p:cNvPr id="51" name="Shape 48"/>
+          <p:cNvSpPr/>
+          <p:nvPr/>
+        </p:nvSpPr>
+        <p:spPr>
+          <a:xfrm>
+            <a:off x="6199632" y="1691640"/>
+            <a:ext cx="5532120" cy="411480"/>
           </a:xfrm>
           <a:prstGeom prst="roundRect">
             <a:avLst>
-              <a:gd name="adj" fmla="val 5926"/>
+              <a:gd name="adj" fmla="val 13333"/>
             </a:avLst>
           </a:prstGeom>
           <a:solidFill>
-            <a:srgbClr val="E8F5E9"/>
+            <a:srgbClr val="1E3A5F"/>
           </a:solidFill>
           <a:ln w="12700">
             <a:solidFill>
-              <a:srgbClr val="2E7D32"/>
+              <a:srgbClr val="1E3A5F"/>
             </a:solidFill>
             <a:prstDash val="solid"/>
           </a:ln>
@@ -5199,14 +5707,53 @@
       </p:sp>
       <p:sp>
         <p:nvSpPr>
-          <p:cNvPr id="38" name="Text 35"/>
-          <p:cNvSpPr/>
-          <p:nvPr/>
-        </p:nvSpPr>
-        <p:spPr>
-          <a:xfrm>
-            <a:off x="7699248" y="3520440"/>
-            <a:ext cx="3922776" cy="292608"/>
+          <p:cNvPr id="52" name="Text 49"/>
+          <p:cNvSpPr/>
+          <p:nvPr/>
+        </p:nvSpPr>
+        <p:spPr>
+          <a:xfrm>
+            <a:off x="6336792" y="1691640"/>
+            <a:ext cx="5257800" cy="411480"/>
+          </a:xfrm>
+          <a:prstGeom prst="rect">
+            <a:avLst/>
+          </a:prstGeom>
+          <a:noFill/>
+          <a:ln/>
+        </p:spPr>
+        <p:txBody>
+          <a:bodyPr wrap="square" lIns="0" tIns="0" rIns="0" bIns="0" rtlCol="0" anchor="ctr"/>
+          <a:lstStyle/>
+          <a:p>
+            <a:pPr indent="0" marL="0">
+              <a:buNone/>
+            </a:pPr>
+            <a:r>
+              <a:rPr lang="en-US" sz="1400" b="1" dirty="0">
+                <a:solidFill>
+                  <a:srgbClr val="FFFFFF"/>
+                </a:solidFill>
+                <a:latin typeface="맑은 고딕" pitchFamily="34" charset="0"/>
+                <a:ea typeface="맑은 고딕" pitchFamily="34" charset="-122"/>
+                <a:cs typeface="맑은 고딕" pitchFamily="34" charset="-120"/>
+              </a:rPr>
+              <a:t>내부망 · 신규 IP 7개</a:t>
+            </a:r>
+            <a:endParaRPr lang="en-US" sz="1400" dirty="0"/>
+          </a:p>
+        </p:txBody>
+      </p:sp>
+      <p:sp>
+        <p:nvSpPr>
+          <p:cNvPr id="53" name="Text 50"/>
+          <p:cNvSpPr/>
+          <p:nvPr/>
+        </p:nvSpPr>
+        <p:spPr>
+          <a:xfrm>
+            <a:off x="6336792" y="2157984"/>
+            <a:ext cx="1371600" cy="228600"/>
           </a:xfrm>
           <a:prstGeom prst="rect">
             <a:avLst/>
@@ -5222,30 +5769,30 @@
               <a:buNone/>
             </a:pPr>
             <a:r>
-              <a:rPr lang="en-US" sz="1400" b="1" dirty="0">
-                <a:solidFill>
-                  <a:srgbClr val="2E7D32"/>
-                </a:solidFill>
-                <a:latin typeface="맑은 고딕" pitchFamily="34" charset="0"/>
-                <a:ea typeface="맑은 고딕" pitchFamily="34" charset="-122"/>
-                <a:cs typeface="맑은 고딕" pitchFamily="34" charset="-120"/>
-              </a:rPr>
-              <a:t>신규 IP 불필요</a:t>
-            </a:r>
-            <a:endParaRPr lang="en-US" sz="1400" dirty="0"/>
-          </a:p>
-        </p:txBody>
-      </p:sp>
-      <p:sp>
-        <p:nvSpPr>
-          <p:cNvPr id="39" name="Text 36"/>
-          <p:cNvSpPr/>
-          <p:nvPr/>
-        </p:nvSpPr>
-        <p:spPr>
-          <a:xfrm>
-            <a:off x="7699248" y="3840480"/>
-            <a:ext cx="3922776" cy="777240"/>
+              <a:rPr lang="en-US" sz="1000" b="1" dirty="0">
+                <a:solidFill>
+                  <a:srgbClr val="64748B"/>
+                </a:solidFill>
+                <a:latin typeface="맑은 고딕" pitchFamily="34" charset="0"/>
+                <a:ea typeface="맑은 고딕" pitchFamily="34" charset="-122"/>
+                <a:cs typeface="맑은 고딕" pitchFamily="34" charset="-120"/>
+              </a:rPr>
+              <a:t>장비</a:t>
+            </a:r>
+            <a:endParaRPr lang="en-US" sz="1000" dirty="0"/>
+          </a:p>
+        </p:txBody>
+      </p:sp>
+      <p:sp>
+        <p:nvSpPr>
+          <p:cNvPr id="54" name="Text 51"/>
+          <p:cNvSpPr/>
+          <p:nvPr/>
+        </p:nvSpPr>
+        <p:spPr>
+          <a:xfrm>
+            <a:off x="8897112" y="2157984"/>
+            <a:ext cx="1371600" cy="228600"/>
           </a:xfrm>
           <a:prstGeom prst="rect">
             <a:avLst/>
@@ -5258,13 +5805,1089 @@
           <a:lstStyle/>
           <a:p>
             <a:pPr indent="0" marL="0">
-              <a:spcAft>
-                <a:spcPts val="200"/>
-              </a:spcAft>
-              <a:buNone/>
-            </a:pPr>
-            <a:r>
-              <a:rPr lang="en-US" sz="1200" dirty="0">
+              <a:buNone/>
+            </a:pPr>
+            <a:r>
+              <a:rPr lang="en-US" sz="1000" b="1" dirty="0">
+                <a:solidFill>
+                  <a:srgbClr val="64748B"/>
+                </a:solidFill>
+                <a:latin typeface="맑은 고딕" pitchFamily="34" charset="0"/>
+                <a:ea typeface="맑은 고딕" pitchFamily="34" charset="-122"/>
+                <a:cs typeface="맑은 고딕" pitchFamily="34" charset="-120"/>
+              </a:rPr>
+              <a:t>할당 IP</a:t>
+            </a:r>
+            <a:endParaRPr lang="en-US" sz="1000" dirty="0"/>
+          </a:p>
+        </p:txBody>
+      </p:sp>
+      <p:sp>
+        <p:nvSpPr>
+          <p:cNvPr id="55" name="Text 52"/>
+          <p:cNvSpPr/>
+          <p:nvPr/>
+        </p:nvSpPr>
+        <p:spPr>
+          <a:xfrm>
+            <a:off x="11000232" y="2157984"/>
+            <a:ext cx="1371600" cy="228600"/>
+          </a:xfrm>
+          <a:prstGeom prst="rect">
+            <a:avLst/>
+          </a:prstGeom>
+          <a:noFill/>
+          <a:ln/>
+        </p:spPr>
+        <p:txBody>
+          <a:bodyPr wrap="square" lIns="0" tIns="0" rIns="0" bIns="0" rtlCol="0" anchor="t"/>
+          <a:lstStyle/>
+          <a:p>
+            <a:pPr indent="0" marL="0">
+              <a:buNone/>
+            </a:pPr>
+            <a:r>
+              <a:rPr lang="en-US" sz="1000" b="1" dirty="0">
+                <a:solidFill>
+                  <a:srgbClr val="64748B"/>
+                </a:solidFill>
+                <a:latin typeface="맑은 고딕" pitchFamily="34" charset="0"/>
+                <a:ea typeface="맑은 고딕" pitchFamily="34" charset="-122"/>
+                <a:cs typeface="맑은 고딕" pitchFamily="34" charset="-120"/>
+              </a:rPr>
+              <a:t>개수</a:t>
+            </a:r>
+            <a:endParaRPr lang="en-US" sz="1000" dirty="0"/>
+          </a:p>
+        </p:txBody>
+      </p:sp>
+      <p:sp>
+        <p:nvSpPr>
+          <p:cNvPr id="56" name="Shape 53"/>
+          <p:cNvSpPr/>
+          <p:nvPr/>
+        </p:nvSpPr>
+        <p:spPr>
+          <a:xfrm>
+            <a:off x="6199632" y="2423160"/>
+            <a:ext cx="5532120" cy="475488"/>
+          </a:xfrm>
+          <a:prstGeom prst="rect">
+            <a:avLst/>
+          </a:prstGeom>
+          <a:solidFill>
+            <a:srgbClr val="F5F7FA"/>
+          </a:solidFill>
+          <a:ln w="9525">
+            <a:solidFill>
+              <a:srgbClr val="CBD5E1"/>
+            </a:solidFill>
+            <a:prstDash val="solid"/>
+          </a:ln>
+        </p:spPr>
+      </p:sp>
+      <p:sp>
+        <p:nvSpPr>
+          <p:cNvPr id="57" name="Text 54"/>
+          <p:cNvSpPr/>
+          <p:nvPr/>
+        </p:nvSpPr>
+        <p:spPr>
+          <a:xfrm>
+            <a:off x="6336792" y="2459736"/>
+            <a:ext cx="2377440" cy="228600"/>
+          </a:xfrm>
+          <a:prstGeom prst="rect">
+            <a:avLst/>
+          </a:prstGeom>
+          <a:noFill/>
+          <a:ln/>
+        </p:spPr>
+        <p:txBody>
+          <a:bodyPr wrap="square" lIns="0" tIns="0" rIns="0" bIns="0" rtlCol="0" anchor="t"/>
+          <a:lstStyle/>
+          <a:p>
+            <a:pPr indent="0" marL="0">
+              <a:buNone/>
+            </a:pPr>
+            <a:r>
+              <a:rPr lang="en-US" sz="1200" b="1" dirty="0">
+                <a:solidFill>
+                  <a:srgbClr val="1F2A3A"/>
+                </a:solidFill>
+                <a:latin typeface="맑은 고딕" pitchFamily="34" charset="0"/>
+                <a:ea typeface="맑은 고딕" pitchFamily="34" charset="-122"/>
+                <a:cs typeface="맑은 고딕" pitchFamily="34" charset="-120"/>
+              </a:rPr>
+              <a:t>Bastion</a:t>
+            </a:r>
+            <a:endParaRPr lang="en-US" sz="1200" dirty="0"/>
+          </a:p>
+        </p:txBody>
+      </p:sp>
+      <p:sp>
+        <p:nvSpPr>
+          <p:cNvPr id="58" name="Text 55"/>
+          <p:cNvSpPr/>
+          <p:nvPr/>
+        </p:nvSpPr>
+        <p:spPr>
+          <a:xfrm>
+            <a:off x="6336792" y="2679192"/>
+            <a:ext cx="2514600" cy="201168"/>
+          </a:xfrm>
+          <a:prstGeom prst="rect">
+            <a:avLst/>
+          </a:prstGeom>
+          <a:noFill/>
+          <a:ln/>
+        </p:spPr>
+        <p:txBody>
+          <a:bodyPr wrap="square" lIns="0" tIns="0" rIns="0" bIns="0" rtlCol="0" anchor="t"/>
+          <a:lstStyle/>
+          <a:p>
+            <a:pPr indent="0" marL="0">
+              <a:buNone/>
+            </a:pPr>
+            <a:r>
+              <a:rPr lang="en-US" sz="900" dirty="0">
+                <a:solidFill>
+                  <a:srgbClr val="64748B"/>
+                </a:solidFill>
+                <a:latin typeface="맑은 고딕" pitchFamily="34" charset="0"/>
+                <a:ea typeface="맑은 고딕" pitchFamily="34" charset="-122"/>
+                <a:cs typeface="맑은 고딕" pitchFamily="34" charset="-120"/>
+              </a:rPr>
+              <a:t>TNS-2100 · 신규 장비</a:t>
+            </a:r>
+            <a:endParaRPr lang="en-US" sz="900" dirty="0"/>
+          </a:p>
+        </p:txBody>
+      </p:sp>
+      <p:sp>
+        <p:nvSpPr>
+          <p:cNvPr id="59" name="Shape 56"/>
+          <p:cNvSpPr/>
+          <p:nvPr/>
+        </p:nvSpPr>
+        <p:spPr>
+          <a:xfrm>
+            <a:off x="8897112" y="2523744"/>
+            <a:ext cx="845820" cy="274320"/>
+          </a:xfrm>
+          <a:prstGeom prst="roundRect">
+            <a:avLst>
+              <a:gd name="adj" fmla="val 50000"/>
+            </a:avLst>
+          </a:prstGeom>
+          <a:solidFill>
+            <a:srgbClr val="6D5AA6"/>
+          </a:solidFill>
+          <a:ln w="12700">
+            <a:solidFill>
+              <a:srgbClr val="6D5AA6"/>
+            </a:solidFill>
+            <a:prstDash val="solid"/>
+          </a:ln>
+        </p:spPr>
+      </p:sp>
+      <p:sp>
+        <p:nvSpPr>
+          <p:cNvPr id="60" name="Text 57"/>
+          <p:cNvSpPr/>
+          <p:nvPr/>
+        </p:nvSpPr>
+        <p:spPr>
+          <a:xfrm>
+            <a:off x="8897112" y="2523744"/>
+            <a:ext cx="845820" cy="274320"/>
+          </a:xfrm>
+          <a:prstGeom prst="rect">
+            <a:avLst/>
+          </a:prstGeom>
+          <a:noFill/>
+          <a:ln/>
+        </p:spPr>
+        <p:txBody>
+          <a:bodyPr wrap="square" lIns="0" tIns="0" rIns="0" bIns="0" rtlCol="0" anchor="ctr"/>
+          <a:lstStyle/>
+          <a:p>
+            <a:pPr algn="ctr" indent="0" marL="0">
+              <a:buNone/>
+            </a:pPr>
+            <a:r>
+              <a:rPr lang="en-US" sz="1000" b="1" dirty="0">
+                <a:solidFill>
+                  <a:srgbClr val="FFFFFF"/>
+                </a:solidFill>
+                <a:latin typeface="맑은 고딕" pitchFamily="34" charset="0"/>
+                <a:ea typeface="맑은 고딕" pitchFamily="34" charset="-122"/>
+                <a:cs typeface="맑은 고딕" pitchFamily="34" charset="-120"/>
+              </a:rPr>
+              <a:t>관리망 1</a:t>
+            </a:r>
+            <a:endParaRPr lang="en-US" sz="1000" dirty="0"/>
+          </a:p>
+        </p:txBody>
+      </p:sp>
+      <p:sp>
+        <p:nvSpPr>
+          <p:cNvPr id="61" name="Shape 58"/>
+          <p:cNvSpPr/>
+          <p:nvPr/>
+        </p:nvSpPr>
+        <p:spPr>
+          <a:xfrm>
+            <a:off x="9834372" y="2523744"/>
+            <a:ext cx="1188720" cy="274320"/>
+          </a:xfrm>
+          <a:prstGeom prst="roundRect">
+            <a:avLst>
+              <a:gd name="adj" fmla="val 50000"/>
+            </a:avLst>
+          </a:prstGeom>
+          <a:solidFill>
+            <a:srgbClr val="B0752F"/>
+          </a:solidFill>
+          <a:ln w="12700">
+            <a:solidFill>
+              <a:srgbClr val="B0752F"/>
+            </a:solidFill>
+            <a:prstDash val="solid"/>
+          </a:ln>
+        </p:spPr>
+      </p:sp>
+      <p:sp>
+        <p:nvSpPr>
+          <p:cNvPr id="62" name="Text 59"/>
+          <p:cNvSpPr/>
+          <p:nvPr/>
+        </p:nvSpPr>
+        <p:spPr>
+          <a:xfrm>
+            <a:off x="9834372" y="2523744"/>
+            <a:ext cx="1188720" cy="274320"/>
+          </a:xfrm>
+          <a:prstGeom prst="rect">
+            <a:avLst/>
+          </a:prstGeom>
+          <a:noFill/>
+          <a:ln/>
+        </p:spPr>
+        <p:txBody>
+          <a:bodyPr wrap="square" lIns="0" tIns="0" rIns="0" bIns="0" rtlCol="0" anchor="ctr"/>
+          <a:lstStyle/>
+          <a:p>
+            <a:pPr algn="ctr" indent="0" marL="0">
+              <a:buNone/>
+            </a:pPr>
+            <a:r>
+              <a:rPr lang="en-US" sz="1000" b="1" dirty="0">
+                <a:solidFill>
+                  <a:srgbClr val="FFFFFF"/>
+                </a:solidFill>
+                <a:latin typeface="맑은 고딕" pitchFamily="34" charset="0"/>
+                <a:ea typeface="맑은 고딕" pitchFamily="34" charset="-122"/>
+                <a:cs typeface="맑은 고딕" pitchFamily="34" charset="-120"/>
+              </a:rPr>
+              <a:t>nasbak 1</a:t>
+            </a:r>
+            <a:endParaRPr lang="en-US" sz="1000" dirty="0"/>
+          </a:p>
+        </p:txBody>
+      </p:sp>
+      <p:sp>
+        <p:nvSpPr>
+          <p:cNvPr id="63" name="Text 60"/>
+          <p:cNvSpPr/>
+          <p:nvPr/>
+        </p:nvSpPr>
+        <p:spPr>
+          <a:xfrm>
+            <a:off x="10954512" y="2423160"/>
+            <a:ext cx="640080" cy="475488"/>
+          </a:xfrm>
+          <a:prstGeom prst="rect">
+            <a:avLst/>
+          </a:prstGeom>
+          <a:noFill/>
+          <a:ln/>
+        </p:spPr>
+        <p:txBody>
+          <a:bodyPr wrap="square" lIns="0" tIns="0" rIns="0" bIns="0" rtlCol="0" anchor="ctr"/>
+          <a:lstStyle/>
+          <a:p>
+            <a:pPr algn="ctr" indent="0" marL="0">
+              <a:buNone/>
+            </a:pPr>
+            <a:r>
+              <a:rPr lang="en-US" sz="1600" b="1" dirty="0">
+                <a:solidFill>
+                  <a:srgbClr val="1E3A5F"/>
+                </a:solidFill>
+                <a:latin typeface="맑은 고딕" pitchFamily="34" charset="0"/>
+                <a:ea typeface="맑은 고딕" pitchFamily="34" charset="-122"/>
+                <a:cs typeface="맑은 고딕" pitchFamily="34" charset="-120"/>
+              </a:rPr>
+              <a:t>2</a:t>
+            </a:r>
+            <a:endParaRPr lang="en-US" sz="1600" dirty="0"/>
+          </a:p>
+        </p:txBody>
+      </p:sp>
+      <p:sp>
+        <p:nvSpPr>
+          <p:cNvPr id="64" name="Shape 61"/>
+          <p:cNvSpPr/>
+          <p:nvPr/>
+        </p:nvSpPr>
+        <p:spPr>
+          <a:xfrm>
+            <a:off x="6199632" y="2935224"/>
+            <a:ext cx="5532120" cy="475488"/>
+          </a:xfrm>
+          <a:prstGeom prst="rect">
+            <a:avLst/>
+          </a:prstGeom>
+          <a:solidFill>
+            <a:srgbClr val="F5F7FA"/>
+          </a:solidFill>
+          <a:ln w="9525">
+            <a:solidFill>
+              <a:srgbClr val="CBD5E1"/>
+            </a:solidFill>
+            <a:prstDash val="solid"/>
+          </a:ln>
+        </p:spPr>
+      </p:sp>
+      <p:sp>
+        <p:nvSpPr>
+          <p:cNvPr id="65" name="Text 62"/>
+          <p:cNvSpPr/>
+          <p:nvPr/>
+        </p:nvSpPr>
+        <p:spPr>
+          <a:xfrm>
+            <a:off x="6336792" y="2971800"/>
+            <a:ext cx="2377440" cy="228600"/>
+          </a:xfrm>
+          <a:prstGeom prst="rect">
+            <a:avLst/>
+          </a:prstGeom>
+          <a:noFill/>
+          <a:ln/>
+        </p:spPr>
+        <p:txBody>
+          <a:bodyPr wrap="square" lIns="0" tIns="0" rIns="0" bIns="0" rtlCol="0" anchor="t"/>
+          <a:lstStyle/>
+          <a:p>
+            <a:pPr indent="0" marL="0">
+              <a:buNone/>
+            </a:pPr>
+            <a:r>
+              <a:rPr lang="en-US" sz="1200" b="1" dirty="0">
+                <a:solidFill>
+                  <a:srgbClr val="1F2A3A"/>
+                </a:solidFill>
+                <a:latin typeface="맑은 고딕" pitchFamily="34" charset="0"/>
+                <a:ea typeface="맑은 고딕" pitchFamily="34" charset="-122"/>
+                <a:cs typeface="맑은 고딕" pitchFamily="34" charset="-120"/>
+              </a:rPr>
+              <a:t>Master KVM</a:t>
+            </a:r>
+            <a:endParaRPr lang="en-US" sz="1200" dirty="0"/>
+          </a:p>
+        </p:txBody>
+      </p:sp>
+      <p:sp>
+        <p:nvSpPr>
+          <p:cNvPr id="66" name="Text 63"/>
+          <p:cNvSpPr/>
+          <p:nvPr/>
+        </p:nvSpPr>
+        <p:spPr>
+          <a:xfrm>
+            <a:off x="6336792" y="3191256"/>
+            <a:ext cx="2514600" cy="201168"/>
+          </a:xfrm>
+          <a:prstGeom prst="rect">
+            <a:avLst/>
+          </a:prstGeom>
+          <a:noFill/>
+          <a:ln/>
+        </p:spPr>
+        <p:txBody>
+          <a:bodyPr wrap="square" lIns="0" tIns="0" rIns="0" bIns="0" rtlCol="0" anchor="t"/>
+          <a:lstStyle/>
+          <a:p>
+            <a:pPr indent="0" marL="0">
+              <a:buNone/>
+            </a:pPr>
+            <a:r>
+              <a:rPr lang="en-US" sz="900" dirty="0">
+                <a:solidFill>
+                  <a:srgbClr val="64748B"/>
+                </a:solidFill>
+                <a:latin typeface="맑은 고딕" pitchFamily="34" charset="0"/>
+                <a:ea typeface="맑은 고딕" pitchFamily="34" charset="-122"/>
+                <a:cs typeface="맑은 고딕" pitchFamily="34" charset="-120"/>
+              </a:rPr>
+              <a:t>기존 HV#03 재구성 · 관리 4회선</a:t>
+            </a:r>
+            <a:endParaRPr lang="en-US" sz="900" dirty="0"/>
+          </a:p>
+        </p:txBody>
+      </p:sp>
+      <p:sp>
+        <p:nvSpPr>
+          <p:cNvPr id="67" name="Shape 64"/>
+          <p:cNvSpPr/>
+          <p:nvPr/>
+        </p:nvSpPr>
+        <p:spPr>
+          <a:xfrm>
+            <a:off x="8897112" y="3035808"/>
+            <a:ext cx="1645920" cy="274320"/>
+          </a:xfrm>
+          <a:prstGeom prst="roundRect">
+            <a:avLst>
+              <a:gd name="adj" fmla="val 50000"/>
+            </a:avLst>
+          </a:prstGeom>
+          <a:solidFill>
+            <a:srgbClr val="6D5AA6"/>
+          </a:solidFill>
+          <a:ln w="12700">
+            <a:solidFill>
+              <a:srgbClr val="6D5AA6"/>
+            </a:solidFill>
+            <a:prstDash val="solid"/>
+          </a:ln>
+        </p:spPr>
+      </p:sp>
+      <p:sp>
+        <p:nvSpPr>
+          <p:cNvPr id="68" name="Text 65"/>
+          <p:cNvSpPr/>
+          <p:nvPr/>
+        </p:nvSpPr>
+        <p:spPr>
+          <a:xfrm>
+            <a:off x="8897112" y="3035808"/>
+            <a:ext cx="1645920" cy="274320"/>
+          </a:xfrm>
+          <a:prstGeom prst="rect">
+            <a:avLst/>
+          </a:prstGeom>
+          <a:noFill/>
+          <a:ln/>
+        </p:spPr>
+        <p:txBody>
+          <a:bodyPr wrap="square" lIns="0" tIns="0" rIns="0" bIns="0" rtlCol="0" anchor="ctr"/>
+          <a:lstStyle/>
+          <a:p>
+            <a:pPr algn="ctr" indent="0" marL="0">
+              <a:buNone/>
+            </a:pPr>
+            <a:r>
+              <a:rPr lang="en-US" sz="1000" b="1" dirty="0">
+                <a:solidFill>
+                  <a:srgbClr val="FFFFFF"/>
+                </a:solidFill>
+                <a:latin typeface="맑은 고딕" pitchFamily="34" charset="0"/>
+                <a:ea typeface="맑은 고딕" pitchFamily="34" charset="-122"/>
+                <a:cs typeface="맑은 고딕" pitchFamily="34" charset="-120"/>
+              </a:rPr>
+              <a:t>관리망 1 · 원격접속</a:t>
+            </a:r>
+            <a:endParaRPr lang="en-US" sz="1000" dirty="0"/>
+          </a:p>
+        </p:txBody>
+      </p:sp>
+      <p:sp>
+        <p:nvSpPr>
+          <p:cNvPr id="69" name="Text 66"/>
+          <p:cNvSpPr/>
+          <p:nvPr/>
+        </p:nvSpPr>
+        <p:spPr>
+          <a:xfrm>
+            <a:off x="10954512" y="2935224"/>
+            <a:ext cx="640080" cy="475488"/>
+          </a:xfrm>
+          <a:prstGeom prst="rect">
+            <a:avLst/>
+          </a:prstGeom>
+          <a:noFill/>
+          <a:ln/>
+        </p:spPr>
+        <p:txBody>
+          <a:bodyPr wrap="square" lIns="0" tIns="0" rIns="0" bIns="0" rtlCol="0" anchor="ctr"/>
+          <a:lstStyle/>
+          <a:p>
+            <a:pPr algn="ctr" indent="0" marL="0">
+              <a:buNone/>
+            </a:pPr>
+            <a:r>
+              <a:rPr lang="en-US" sz="1600" b="1" dirty="0">
+                <a:solidFill>
+                  <a:srgbClr val="1E3A5F"/>
+                </a:solidFill>
+                <a:latin typeface="맑은 고딕" pitchFamily="34" charset="0"/>
+                <a:ea typeface="맑은 고딕" pitchFamily="34" charset="-122"/>
+                <a:cs typeface="맑은 고딕" pitchFamily="34" charset="-120"/>
+              </a:rPr>
+              <a:t>1</a:t>
+            </a:r>
+            <a:endParaRPr lang="en-US" sz="1600" dirty="0"/>
+          </a:p>
+        </p:txBody>
+      </p:sp>
+      <p:sp>
+        <p:nvSpPr>
+          <p:cNvPr id="70" name="Shape 67"/>
+          <p:cNvSpPr/>
+          <p:nvPr/>
+        </p:nvSpPr>
+        <p:spPr>
+          <a:xfrm>
+            <a:off x="6199632" y="3447288"/>
+            <a:ext cx="5532120" cy="475488"/>
+          </a:xfrm>
+          <a:prstGeom prst="rect">
+            <a:avLst/>
+          </a:prstGeom>
+          <a:solidFill>
+            <a:srgbClr val="FFFFFF"/>
+          </a:solidFill>
+          <a:ln w="9525">
+            <a:solidFill>
+              <a:srgbClr val="CBD5E1"/>
+            </a:solidFill>
+            <a:prstDash val="solid"/>
+          </a:ln>
+        </p:spPr>
+      </p:sp>
+      <p:sp>
+        <p:nvSpPr>
+          <p:cNvPr id="71" name="Text 68"/>
+          <p:cNvSpPr/>
+          <p:nvPr/>
+        </p:nvSpPr>
+        <p:spPr>
+          <a:xfrm>
+            <a:off x="6473952" y="3483864"/>
+            <a:ext cx="2377440" cy="228600"/>
+          </a:xfrm>
+          <a:prstGeom prst="rect">
+            <a:avLst/>
+          </a:prstGeom>
+          <a:noFill/>
+          <a:ln/>
+        </p:spPr>
+        <p:txBody>
+          <a:bodyPr wrap="square" lIns="0" tIns="0" rIns="0" bIns="0" rtlCol="0" anchor="t"/>
+          <a:lstStyle/>
+          <a:p>
+            <a:pPr indent="0" marL="0">
+              <a:buNone/>
+            </a:pPr>
+            <a:r>
+              <a:rPr lang="en-US" sz="1200" b="1" dirty="0">
+                <a:solidFill>
+                  <a:srgbClr val="1F2A3A"/>
+                </a:solidFill>
+                <a:latin typeface="맑은 고딕" pitchFamily="34" charset="0"/>
+                <a:ea typeface="맑은 고딕" pitchFamily="34" charset="-122"/>
+                <a:cs typeface="맑은 고딕" pitchFamily="34" charset="-120"/>
+              </a:rPr>
+              <a:t>└ master-1·2·3</a:t>
+            </a:r>
+            <a:endParaRPr lang="en-US" sz="1200" dirty="0"/>
+          </a:p>
+        </p:txBody>
+      </p:sp>
+      <p:sp>
+        <p:nvSpPr>
+          <p:cNvPr id="72" name="Text 69"/>
+          <p:cNvSpPr/>
+          <p:nvPr/>
+        </p:nvSpPr>
+        <p:spPr>
+          <a:xfrm>
+            <a:off x="6702552" y="3703320"/>
+            <a:ext cx="2514600" cy="201168"/>
+          </a:xfrm>
+          <a:prstGeom prst="rect">
+            <a:avLst/>
+          </a:prstGeom>
+          <a:noFill/>
+          <a:ln/>
+        </p:spPr>
+        <p:txBody>
+          <a:bodyPr wrap="square" lIns="0" tIns="0" rIns="0" bIns="0" rtlCol="0" anchor="t"/>
+          <a:lstStyle/>
+          <a:p>
+            <a:pPr indent="0" marL="0">
+              <a:buNone/>
+            </a:pPr>
+            <a:r>
+              <a:rPr lang="en-US" sz="900" dirty="0">
+                <a:solidFill>
+                  <a:srgbClr val="64748B"/>
+                </a:solidFill>
+                <a:latin typeface="맑은 고딕" pitchFamily="34" charset="0"/>
+                <a:ea typeface="맑은 고딕" pitchFamily="34" charset="-122"/>
+                <a:cs typeface="맑은 고딕" pitchFamily="34" charset="-120"/>
+              </a:rPr>
+              <a:t>Master VM</a:t>
+            </a:r>
+            <a:endParaRPr lang="en-US" sz="900" dirty="0"/>
+          </a:p>
+        </p:txBody>
+      </p:sp>
+      <p:sp>
+        <p:nvSpPr>
+          <p:cNvPr id="73" name="Shape 70"/>
+          <p:cNvSpPr/>
+          <p:nvPr/>
+        </p:nvSpPr>
+        <p:spPr>
+          <a:xfrm>
+            <a:off x="8897112" y="3547872"/>
+            <a:ext cx="845820" cy="274320"/>
+          </a:xfrm>
+          <a:prstGeom prst="roundRect">
+            <a:avLst>
+              <a:gd name="adj" fmla="val 50000"/>
+            </a:avLst>
+          </a:prstGeom>
+          <a:solidFill>
+            <a:srgbClr val="6D5AA6"/>
+          </a:solidFill>
+          <a:ln w="12700">
+            <a:solidFill>
+              <a:srgbClr val="6D5AA6"/>
+            </a:solidFill>
+            <a:prstDash val="solid"/>
+          </a:ln>
+        </p:spPr>
+      </p:sp>
+      <p:sp>
+        <p:nvSpPr>
+          <p:cNvPr id="74" name="Text 71"/>
+          <p:cNvSpPr/>
+          <p:nvPr/>
+        </p:nvSpPr>
+        <p:spPr>
+          <a:xfrm>
+            <a:off x="8897112" y="3547872"/>
+            <a:ext cx="845820" cy="274320"/>
+          </a:xfrm>
+          <a:prstGeom prst="rect">
+            <a:avLst/>
+          </a:prstGeom>
+          <a:noFill/>
+          <a:ln/>
+        </p:spPr>
+        <p:txBody>
+          <a:bodyPr wrap="square" lIns="0" tIns="0" rIns="0" bIns="0" rtlCol="0" anchor="ctr"/>
+          <a:lstStyle/>
+          <a:p>
+            <a:pPr algn="ctr" indent="0" marL="0">
+              <a:buNone/>
+            </a:pPr>
+            <a:r>
+              <a:rPr lang="en-US" sz="1000" b="1" dirty="0">
+                <a:solidFill>
+                  <a:srgbClr val="FFFFFF"/>
+                </a:solidFill>
+                <a:latin typeface="맑은 고딕" pitchFamily="34" charset="0"/>
+                <a:ea typeface="맑은 고딕" pitchFamily="34" charset="-122"/>
+                <a:cs typeface="맑은 고딕" pitchFamily="34" charset="-120"/>
+              </a:rPr>
+              <a:t>관리망 3</a:t>
+            </a:r>
+            <a:endParaRPr lang="en-US" sz="1000" dirty="0"/>
+          </a:p>
+        </p:txBody>
+      </p:sp>
+      <p:sp>
+        <p:nvSpPr>
+          <p:cNvPr id="75" name="Text 72"/>
+          <p:cNvSpPr/>
+          <p:nvPr/>
+        </p:nvSpPr>
+        <p:spPr>
+          <a:xfrm>
+            <a:off x="10954512" y="3447288"/>
+            <a:ext cx="640080" cy="475488"/>
+          </a:xfrm>
+          <a:prstGeom prst="rect">
+            <a:avLst/>
+          </a:prstGeom>
+          <a:noFill/>
+          <a:ln/>
+        </p:spPr>
+        <p:txBody>
+          <a:bodyPr wrap="square" lIns="0" tIns="0" rIns="0" bIns="0" rtlCol="0" anchor="ctr"/>
+          <a:lstStyle/>
+          <a:p>
+            <a:pPr algn="ctr" indent="0" marL="0">
+              <a:buNone/>
+            </a:pPr>
+            <a:r>
+              <a:rPr lang="en-US" sz="1600" b="1" dirty="0">
+                <a:solidFill>
+                  <a:srgbClr val="1E3A5F"/>
+                </a:solidFill>
+                <a:latin typeface="맑은 고딕" pitchFamily="34" charset="0"/>
+                <a:ea typeface="맑은 고딕" pitchFamily="34" charset="-122"/>
+                <a:cs typeface="맑은 고딕" pitchFamily="34" charset="-120"/>
+              </a:rPr>
+              <a:t>3</a:t>
+            </a:r>
+            <a:endParaRPr lang="en-US" sz="1600" dirty="0"/>
+          </a:p>
+        </p:txBody>
+      </p:sp>
+      <p:sp>
+        <p:nvSpPr>
+          <p:cNvPr id="76" name="Shape 73"/>
+          <p:cNvSpPr/>
+          <p:nvPr/>
+        </p:nvSpPr>
+        <p:spPr>
+          <a:xfrm>
+            <a:off x="6199632" y="3959352"/>
+            <a:ext cx="5532120" cy="475488"/>
+          </a:xfrm>
+          <a:prstGeom prst="rect">
+            <a:avLst/>
+          </a:prstGeom>
+          <a:solidFill>
+            <a:srgbClr val="FFFFFF"/>
+          </a:solidFill>
+          <a:ln w="9525">
+            <a:solidFill>
+              <a:srgbClr val="CBD5E1"/>
+            </a:solidFill>
+            <a:prstDash val="dash"/>
+          </a:ln>
+        </p:spPr>
+      </p:sp>
+      <p:sp>
+        <p:nvSpPr>
+          <p:cNvPr id="77" name="Text 74"/>
+          <p:cNvSpPr/>
+          <p:nvPr/>
+        </p:nvSpPr>
+        <p:spPr>
+          <a:xfrm>
+            <a:off x="6473952" y="3995928"/>
+            <a:ext cx="2377440" cy="228600"/>
+          </a:xfrm>
+          <a:prstGeom prst="rect">
+            <a:avLst/>
+          </a:prstGeom>
+          <a:noFill/>
+          <a:ln/>
+        </p:spPr>
+        <p:txBody>
+          <a:bodyPr wrap="square" lIns="0" tIns="0" rIns="0" bIns="0" rtlCol="0" anchor="t"/>
+          <a:lstStyle/>
+          <a:p>
+            <a:pPr indent="0" marL="0">
+              <a:buNone/>
+            </a:pPr>
+            <a:r>
+              <a:rPr lang="en-US" sz="1200" b="1" dirty="0">
+                <a:solidFill>
+                  <a:srgbClr val="1F2A3A"/>
+                </a:solidFill>
+                <a:latin typeface="맑은 고딕" pitchFamily="34" charset="0"/>
+                <a:ea typeface="맑은 고딕" pitchFamily="34" charset="-122"/>
+                <a:cs typeface="맑은 고딕" pitchFamily="34" charset="-120"/>
+              </a:rPr>
+              <a:t>└ bootstrap</a:t>
+            </a:r>
+            <a:endParaRPr lang="en-US" sz="1200" dirty="0"/>
+          </a:p>
+        </p:txBody>
+      </p:sp>
+      <p:sp>
+        <p:nvSpPr>
+          <p:cNvPr id="78" name="Text 75"/>
+          <p:cNvSpPr/>
+          <p:nvPr/>
+        </p:nvSpPr>
+        <p:spPr>
+          <a:xfrm>
+            <a:off x="6702552" y="4215384"/>
+            <a:ext cx="2514600" cy="201168"/>
+          </a:xfrm>
+          <a:prstGeom prst="rect">
+            <a:avLst/>
+          </a:prstGeom>
+          <a:noFill/>
+          <a:ln/>
+        </p:spPr>
+        <p:txBody>
+          <a:bodyPr wrap="square" lIns="0" tIns="0" rIns="0" bIns="0" rtlCol="0" anchor="t"/>
+          <a:lstStyle/>
+          <a:p>
+            <a:pPr indent="0" marL="0">
+              <a:buNone/>
+            </a:pPr>
+            <a:r>
+              <a:rPr lang="en-US" sz="900" dirty="0">
+                <a:solidFill>
+                  <a:srgbClr val="64748B"/>
+                </a:solidFill>
+                <a:latin typeface="맑은 고딕" pitchFamily="34" charset="0"/>
+                <a:ea typeface="맑은 고딕" pitchFamily="34" charset="-122"/>
+                <a:cs typeface="맑은 고딕" pitchFamily="34" charset="-120"/>
+              </a:rPr>
+              <a:t>임시 VM · master 구성 후 반납</a:t>
+            </a:r>
+            <a:endParaRPr lang="en-US" sz="900" dirty="0"/>
+          </a:p>
+        </p:txBody>
+      </p:sp>
+      <p:sp>
+        <p:nvSpPr>
+          <p:cNvPr id="79" name="Shape 76"/>
+          <p:cNvSpPr/>
+          <p:nvPr/>
+        </p:nvSpPr>
+        <p:spPr>
+          <a:xfrm>
+            <a:off x="8897112" y="4059936"/>
+            <a:ext cx="845820" cy="274320"/>
+          </a:xfrm>
+          <a:prstGeom prst="roundRect">
+            <a:avLst>
+              <a:gd name="adj" fmla="val 50000"/>
+            </a:avLst>
+          </a:prstGeom>
+          <a:solidFill>
+            <a:srgbClr val="6D5AA6"/>
+          </a:solidFill>
+          <a:ln w="12700">
+            <a:solidFill>
+              <a:srgbClr val="6D5AA6"/>
+            </a:solidFill>
+            <a:prstDash val="solid"/>
+          </a:ln>
+        </p:spPr>
+      </p:sp>
+      <p:sp>
+        <p:nvSpPr>
+          <p:cNvPr id="80" name="Text 77"/>
+          <p:cNvSpPr/>
+          <p:nvPr/>
+        </p:nvSpPr>
+        <p:spPr>
+          <a:xfrm>
+            <a:off x="8897112" y="4059936"/>
+            <a:ext cx="845820" cy="274320"/>
+          </a:xfrm>
+          <a:prstGeom prst="rect">
+            <a:avLst/>
+          </a:prstGeom>
+          <a:noFill/>
+          <a:ln/>
+        </p:spPr>
+        <p:txBody>
+          <a:bodyPr wrap="square" lIns="0" tIns="0" rIns="0" bIns="0" rtlCol="0" anchor="ctr"/>
+          <a:lstStyle/>
+          <a:p>
+            <a:pPr algn="ctr" indent="0" marL="0">
+              <a:buNone/>
+            </a:pPr>
+            <a:r>
+              <a:rPr lang="en-US" sz="1000" b="1" dirty="0">
+                <a:solidFill>
+                  <a:srgbClr val="FFFFFF"/>
+                </a:solidFill>
+                <a:latin typeface="맑은 고딕" pitchFamily="34" charset="0"/>
+                <a:ea typeface="맑은 고딕" pitchFamily="34" charset="-122"/>
+                <a:cs typeface="맑은 고딕" pitchFamily="34" charset="-120"/>
+              </a:rPr>
+              <a:t>관리망 1</a:t>
+            </a:r>
+            <a:endParaRPr lang="en-US" sz="1000" dirty="0"/>
+          </a:p>
+        </p:txBody>
+      </p:sp>
+      <p:sp>
+        <p:nvSpPr>
+          <p:cNvPr id="81" name="Text 78"/>
+          <p:cNvSpPr/>
+          <p:nvPr/>
+        </p:nvSpPr>
+        <p:spPr>
+          <a:xfrm>
+            <a:off x="10954512" y="3959352"/>
+            <a:ext cx="640080" cy="475488"/>
+          </a:xfrm>
+          <a:prstGeom prst="rect">
+            <a:avLst/>
+          </a:prstGeom>
+          <a:noFill/>
+          <a:ln/>
+        </p:spPr>
+        <p:txBody>
+          <a:bodyPr wrap="square" lIns="0" tIns="0" rIns="0" bIns="0" rtlCol="0" anchor="ctr"/>
+          <a:lstStyle/>
+          <a:p>
+            <a:pPr algn="ctr" indent="0" marL="0">
+              <a:buNone/>
+            </a:pPr>
+            <a:r>
+              <a:rPr lang="en-US" sz="1600" b="1" dirty="0">
+                <a:solidFill>
+                  <a:srgbClr val="1E3A5F"/>
+                </a:solidFill>
+                <a:latin typeface="맑은 고딕" pitchFamily="34" charset="0"/>
+                <a:ea typeface="맑은 고딕" pitchFamily="34" charset="-122"/>
+                <a:cs typeface="맑은 고딕" pitchFamily="34" charset="-120"/>
+              </a:rPr>
+              <a:t>1</a:t>
+            </a:r>
+            <a:endParaRPr lang="en-US" sz="1600" dirty="0"/>
+          </a:p>
+        </p:txBody>
+      </p:sp>
+      <p:sp>
+        <p:nvSpPr>
+          <p:cNvPr id="82" name="Shape 79"/>
+          <p:cNvSpPr/>
+          <p:nvPr/>
+        </p:nvSpPr>
+        <p:spPr>
+          <a:xfrm>
+            <a:off x="6199632" y="4471416"/>
+            <a:ext cx="5532120" cy="475488"/>
+          </a:xfrm>
+          <a:prstGeom prst="rect">
+            <a:avLst/>
+          </a:prstGeom>
+          <a:solidFill>
+            <a:srgbClr val="F5F7FA"/>
+          </a:solidFill>
+          <a:ln w="9525">
+            <a:solidFill>
+              <a:srgbClr val="CBD5E1"/>
+            </a:solidFill>
+            <a:prstDash val="solid"/>
+          </a:ln>
+        </p:spPr>
+      </p:sp>
+      <p:sp>
+        <p:nvSpPr>
+          <p:cNvPr id="83" name="Text 80"/>
+          <p:cNvSpPr/>
+          <p:nvPr/>
+        </p:nvSpPr>
+        <p:spPr>
+          <a:xfrm>
+            <a:off x="6336792" y="4507992"/>
+            <a:ext cx="2377440" cy="228600"/>
+          </a:xfrm>
+          <a:prstGeom prst="rect">
+            <a:avLst/>
+          </a:prstGeom>
+          <a:noFill/>
+          <a:ln/>
+        </p:spPr>
+        <p:txBody>
+          <a:bodyPr wrap="square" lIns="0" tIns="0" rIns="0" bIns="0" rtlCol="0" anchor="t"/>
+          <a:lstStyle/>
+          <a:p>
+            <a:pPr indent="0" marL="0">
+              <a:buNone/>
+            </a:pPr>
+            <a:r>
+              <a:rPr lang="en-US" sz="1200" b="1" dirty="0">
+                <a:solidFill>
+                  <a:srgbClr val="1F2A3A"/>
+                </a:solidFill>
+                <a:latin typeface="맑은 고딕" pitchFamily="34" charset="0"/>
+                <a:ea typeface="맑은 고딕" pitchFamily="34" charset="-122"/>
+                <a:cs typeface="맑은 고딕" pitchFamily="34" charset="-120"/>
+              </a:rPr>
+              <a:t>Worker1</a:t>
+            </a:r>
+            <a:endParaRPr lang="en-US" sz="1200" dirty="0"/>
+          </a:p>
+        </p:txBody>
+      </p:sp>
+      <p:sp>
+        <p:nvSpPr>
+          <p:cNvPr id="84" name="Text 81"/>
+          <p:cNvSpPr/>
+          <p:nvPr/>
+        </p:nvSpPr>
+        <p:spPr>
+          <a:xfrm>
+            <a:off x="6336792" y="4727448"/>
+            <a:ext cx="2514600" cy="201168"/>
+          </a:xfrm>
+          <a:prstGeom prst="rect">
+            <a:avLst/>
+          </a:prstGeom>
+          <a:noFill/>
+          <a:ln/>
+        </p:spPr>
+        <p:txBody>
+          <a:bodyPr wrap="square" lIns="0" tIns="0" rIns="0" bIns="0" rtlCol="0" anchor="t"/>
+          <a:lstStyle/>
+          <a:p>
+            <a:pPr indent="0" marL="0">
+              <a:buNone/>
+            </a:pPr>
+            <a:r>
+              <a:rPr lang="en-US" sz="900" dirty="0">
+                <a:solidFill>
+                  <a:srgbClr val="64748B"/>
+                </a:solidFill>
+                <a:latin typeface="맑은 고딕" pitchFamily="34" charset="0"/>
+                <a:ea typeface="맑은 고딕" pitchFamily="34" charset="-122"/>
+                <a:cs typeface="맑은 고딕" pitchFamily="34" charset="-120"/>
+              </a:rPr>
+              <a:t>기존 HV#01 재구성</a:t>
+            </a:r>
+            <a:endParaRPr lang="en-US" sz="900" dirty="0"/>
+          </a:p>
+        </p:txBody>
+      </p:sp>
+      <p:sp>
+        <p:nvSpPr>
+          <p:cNvPr id="85" name="Text 82"/>
+          <p:cNvSpPr/>
+          <p:nvPr/>
+        </p:nvSpPr>
+        <p:spPr>
+          <a:xfrm>
+            <a:off x="8897112" y="4471416"/>
+            <a:ext cx="2057400" cy="475488"/>
+          </a:xfrm>
+          <a:prstGeom prst="rect">
+            <a:avLst/>
+          </a:prstGeom>
+          <a:noFill/>
+          <a:ln/>
+        </p:spPr>
+        <p:txBody>
+          <a:bodyPr wrap="square" lIns="0" tIns="0" rIns="0" bIns="0" rtlCol="0" anchor="ctr"/>
+          <a:lstStyle/>
+          <a:p>
+            <a:pPr indent="0" marL="0">
+              <a:buNone/>
+            </a:pPr>
+            <a:r>
+              <a:rPr lang="en-US" sz="1050" dirty="0">
                 <a:solidFill>
                   <a:srgbClr val="334155"/>
                 </a:solidFill>
@@ -5272,19 +6895,180 @@
                 <a:ea typeface="맑은 고딕" pitchFamily="34" charset="-122"/>
                 <a:cs typeface="맑은 고딕" pitchFamily="34" charset="-120"/>
               </a:rPr>
-              <a:t>Worker 1·2: 기존 HV IP 재사용</a:t>
+              <a:t>기존 HV IP 재사용</a:t>
+            </a:r>
+            <a:endParaRPr lang="en-US" sz="1050" dirty="0"/>
+          </a:p>
+        </p:txBody>
+      </p:sp>
+      <p:sp>
+        <p:nvSpPr>
+          <p:cNvPr id="86" name="Text 83"/>
+          <p:cNvSpPr/>
+          <p:nvPr/>
+        </p:nvSpPr>
+        <p:spPr>
+          <a:xfrm>
+            <a:off x="10954512" y="4471416"/>
+            <a:ext cx="640080" cy="475488"/>
+          </a:xfrm>
+          <a:prstGeom prst="rect">
+            <a:avLst/>
+          </a:prstGeom>
+          <a:noFill/>
+          <a:ln/>
+        </p:spPr>
+        <p:txBody>
+          <a:bodyPr wrap="square" lIns="0" tIns="0" rIns="0" bIns="0" rtlCol="0" anchor="ctr"/>
+          <a:lstStyle/>
+          <a:p>
+            <a:pPr algn="ctr" indent="0" marL="0">
+              <a:buNone/>
+            </a:pPr>
+            <a:r>
+              <a:rPr lang="en-US" sz="1200" b="1" dirty="0">
+                <a:solidFill>
+                  <a:srgbClr val="64748B"/>
+                </a:solidFill>
+                <a:latin typeface="맑은 고딕" pitchFamily="34" charset="0"/>
+                <a:ea typeface="맑은 고딕" pitchFamily="34" charset="-122"/>
+                <a:cs typeface="맑은 고딕" pitchFamily="34" charset="-120"/>
+              </a:rPr>
+              <a:t>—</a:t>
             </a:r>
             <a:endParaRPr lang="en-US" sz="1200" dirty="0"/>
           </a:p>
-          <a:p>
-            <a:pPr indent="0" marL="0">
-              <a:spcAft>
-                <a:spcPts val="200"/>
-              </a:spcAft>
-              <a:buNone/>
-            </a:pPr>
-            <a:r>
-              <a:rPr lang="en-US" sz="1200" dirty="0">
+        </p:txBody>
+      </p:sp>
+      <p:sp>
+        <p:nvSpPr>
+          <p:cNvPr id="87" name="Shape 84"/>
+          <p:cNvSpPr/>
+          <p:nvPr/>
+        </p:nvSpPr>
+        <p:spPr>
+          <a:xfrm>
+            <a:off x="6199632" y="4983480"/>
+            <a:ext cx="5532120" cy="475488"/>
+          </a:xfrm>
+          <a:prstGeom prst="rect">
+            <a:avLst/>
+          </a:prstGeom>
+          <a:solidFill>
+            <a:srgbClr val="F5F7FA"/>
+          </a:solidFill>
+          <a:ln w="9525">
+            <a:solidFill>
+              <a:srgbClr val="CBD5E1"/>
+            </a:solidFill>
+            <a:prstDash val="solid"/>
+          </a:ln>
+        </p:spPr>
+      </p:sp>
+      <p:sp>
+        <p:nvSpPr>
+          <p:cNvPr id="88" name="Text 85"/>
+          <p:cNvSpPr/>
+          <p:nvPr/>
+        </p:nvSpPr>
+        <p:spPr>
+          <a:xfrm>
+            <a:off x="6336792" y="5020056"/>
+            <a:ext cx="2377440" cy="228600"/>
+          </a:xfrm>
+          <a:prstGeom prst="rect">
+            <a:avLst/>
+          </a:prstGeom>
+          <a:noFill/>
+          <a:ln/>
+        </p:spPr>
+        <p:txBody>
+          <a:bodyPr wrap="square" lIns="0" tIns="0" rIns="0" bIns="0" rtlCol="0" anchor="t"/>
+          <a:lstStyle/>
+          <a:p>
+            <a:pPr indent="0" marL="0">
+              <a:buNone/>
+            </a:pPr>
+            <a:r>
+              <a:rPr lang="en-US" sz="1200" b="1" dirty="0">
+                <a:solidFill>
+                  <a:srgbClr val="1F2A3A"/>
+                </a:solidFill>
+                <a:latin typeface="맑은 고딕" pitchFamily="34" charset="0"/>
+                <a:ea typeface="맑은 고딕" pitchFamily="34" charset="-122"/>
+                <a:cs typeface="맑은 고딕" pitchFamily="34" charset="-120"/>
+              </a:rPr>
+              <a:t>Worker2</a:t>
+            </a:r>
+            <a:endParaRPr lang="en-US" sz="1200" dirty="0"/>
+          </a:p>
+        </p:txBody>
+      </p:sp>
+      <p:sp>
+        <p:nvSpPr>
+          <p:cNvPr id="89" name="Text 86"/>
+          <p:cNvSpPr/>
+          <p:nvPr/>
+        </p:nvSpPr>
+        <p:spPr>
+          <a:xfrm>
+            <a:off x="6336792" y="5239512"/>
+            <a:ext cx="2514600" cy="201168"/>
+          </a:xfrm>
+          <a:prstGeom prst="rect">
+            <a:avLst/>
+          </a:prstGeom>
+          <a:noFill/>
+          <a:ln/>
+        </p:spPr>
+        <p:txBody>
+          <a:bodyPr wrap="square" lIns="0" tIns="0" rIns="0" bIns="0" rtlCol="0" anchor="t"/>
+          <a:lstStyle/>
+          <a:p>
+            <a:pPr indent="0" marL="0">
+              <a:buNone/>
+            </a:pPr>
+            <a:r>
+              <a:rPr lang="en-US" sz="900" dirty="0">
+                <a:solidFill>
+                  <a:srgbClr val="64748B"/>
+                </a:solidFill>
+                <a:latin typeface="맑은 고딕" pitchFamily="34" charset="0"/>
+                <a:ea typeface="맑은 고딕" pitchFamily="34" charset="-122"/>
+                <a:cs typeface="맑은 고딕" pitchFamily="34" charset="-120"/>
+              </a:rPr>
+              <a:t>기존 HV#02 · MTV 후 재구성</a:t>
+            </a:r>
+            <a:endParaRPr lang="en-US" sz="900" dirty="0"/>
+          </a:p>
+        </p:txBody>
+      </p:sp>
+      <p:sp>
+        <p:nvSpPr>
+          <p:cNvPr id="90" name="Text 87"/>
+          <p:cNvSpPr/>
+          <p:nvPr/>
+        </p:nvSpPr>
+        <p:spPr>
+          <a:xfrm>
+            <a:off x="8897112" y="4983480"/>
+            <a:ext cx="2057400" cy="475488"/>
+          </a:xfrm>
+          <a:prstGeom prst="rect">
+            <a:avLst/>
+          </a:prstGeom>
+          <a:noFill/>
+          <a:ln/>
+        </p:spPr>
+        <p:txBody>
+          <a:bodyPr wrap="square" lIns="0" tIns="0" rIns="0" bIns="0" rtlCol="0" anchor="ctr"/>
+          <a:lstStyle/>
+          <a:p>
+            <a:pPr indent="0" marL="0">
+              <a:buNone/>
+            </a:pPr>
+            <a:r>
+              <a:rPr lang="en-US" sz="1050" dirty="0">
                 <a:solidFill>
                   <a:srgbClr val="334155"/>
                 </a:solidFill>
@@ -5292,7 +7076,46 @@
                 <a:ea typeface="맑은 고딕" pitchFamily="34" charset="-122"/>
                 <a:cs typeface="맑은 고딕" pitchFamily="34" charset="-120"/>
               </a:rPr>
-              <a:t>업무 VM: 기존 IP 유지</a:t>
+              <a:t>기존 HV IP 재사용</a:t>
+            </a:r>
+            <a:endParaRPr lang="en-US" sz="1050" dirty="0"/>
+          </a:p>
+        </p:txBody>
+      </p:sp>
+      <p:sp>
+        <p:nvSpPr>
+          <p:cNvPr id="91" name="Text 88"/>
+          <p:cNvSpPr/>
+          <p:nvPr/>
+        </p:nvSpPr>
+        <p:spPr>
+          <a:xfrm>
+            <a:off x="10954512" y="4983480"/>
+            <a:ext cx="640080" cy="475488"/>
+          </a:xfrm>
+          <a:prstGeom prst="rect">
+            <a:avLst/>
+          </a:prstGeom>
+          <a:noFill/>
+          <a:ln/>
+        </p:spPr>
+        <p:txBody>
+          <a:bodyPr wrap="square" lIns="0" tIns="0" rIns="0" bIns="0" rtlCol="0" anchor="ctr"/>
+          <a:lstStyle/>
+          <a:p>
+            <a:pPr algn="ctr" indent="0" marL="0">
+              <a:buNone/>
+            </a:pPr>
+            <a:r>
+              <a:rPr lang="en-US" sz="1200" b="1" dirty="0">
+                <a:solidFill>
+                  <a:srgbClr val="64748B"/>
+                </a:solidFill>
+                <a:latin typeface="맑은 고딕" pitchFamily="34" charset="0"/>
+                <a:ea typeface="맑은 고딕" pitchFamily="34" charset="-122"/>
+                <a:cs typeface="맑은 고딕" pitchFamily="34" charset="-120"/>
+              </a:rPr>
+              <a:t>—</a:t>
             </a:r>
             <a:endParaRPr lang="en-US" sz="1200" dirty="0"/>
           </a:p>
@@ -5300,63 +7123,7 @@
       </p:sp>
       <p:sp>
         <p:nvSpPr>
-          <p:cNvPr id="40" name="Text 37"/>
-          <p:cNvSpPr/>
-          <p:nvPr/>
-        </p:nvSpPr>
-        <p:spPr>
-          <a:xfrm>
-            <a:off x="457200" y="4846320"/>
-            <a:ext cx="11274552" cy="640080"/>
-          </a:xfrm>
-          <a:prstGeom prst="rect">
-            <a:avLst/>
-          </a:prstGeom>
-          <a:noFill/>
-          <a:ln/>
-        </p:spPr>
-        <p:txBody>
-          <a:bodyPr wrap="square" lIns="0" tIns="0" rIns="0" bIns="0" rtlCol="0" anchor="t"/>
-          <a:lstStyle/>
-          <a:p>
-            <a:pPr indent="0" marL="0">
-              <a:buNone/>
-            </a:pPr>
-            <a:r>
-              <a:rPr lang="en-US" sz="1100" dirty="0">
-                <a:solidFill>
-                  <a:srgbClr val="334155"/>
-                </a:solidFill>
-                <a:latin typeface="맑은 고딕" pitchFamily="34" charset="0"/>
-                <a:ea typeface="맑은 고딕" pitchFamily="34" charset="-122"/>
-                <a:cs typeface="맑은 고딕" pitchFamily="34" charset="-120"/>
-              </a:rPr>
-              <a:t>· 할당 시기: 10월(1차), 11월 Bastion 구축 전</a:t>
-            </a:r>
-            <a:endParaRPr lang="en-US" sz="1100" dirty="0"/>
-          </a:p>
-          <a:p>
-            <a:pPr indent="0" marL="0">
-              <a:buNone/>
-            </a:pPr>
-            <a:r>
-              <a:rPr lang="en-US" sz="1100" dirty="0">
-                <a:solidFill>
-                  <a:srgbClr val="334155"/>
-                </a:solidFill>
-                <a:latin typeface="맑은 고딕" pitchFamily="34" charset="0"/>
-                <a:ea typeface="맑은 고딕" pitchFamily="34" charset="-122"/>
-                <a:cs typeface="맑은 고딕" pitchFamily="34" charset="-120"/>
-              </a:rPr>
-              <a:t>· Master KVM 호스트: 관리망 IP 없음 (br0 브리지만 구성)</a:t>
-            </a:r>
-            <a:endParaRPr lang="en-US" sz="1100" dirty="0"/>
-          </a:p>
-        </p:txBody>
-      </p:sp>
-      <p:sp>
-        <p:nvSpPr>
-          <p:cNvPr id="41" name="Shape 38"/>
+          <p:cNvPr id="92" name="Shape 89"/>
           <p:cNvSpPr/>
           <p:nvPr/>
         </p:nvSpPr>
@@ -5383,7 +7150,7 @@
       </p:sp>
       <p:sp>
         <p:nvSpPr>
-          <p:cNvPr id="42" name="Text 39"/>
+          <p:cNvPr id="93" name="Text 90"/>
           <p:cNvSpPr/>
           <p:nvPr/>
         </p:nvSpPr>
@@ -5479,7 +7246,7 @@
       </p:sp>
       <p:sp>
         <p:nvSpPr>
-          <p:cNvPr id="43" name="Text 40"/>
+          <p:cNvPr id="94" name="Text 91"/>
           <p:cNvSpPr/>
           <p:nvPr/>
         </p:nvSpPr>
@@ -11544,7 +13311,7 @@
                           <a:ea typeface="맑은 고딕" pitchFamily="34" charset="-122"/>
                           <a:cs typeface="맑은 고딕" pitchFamily="34" charset="-120"/>
                         </a:rPr>
-                        <a:t>재활용 TNS-2100 3대 랙 설치 · 전원 · 관리 2포트 · IPMI 결선</a:t>
+                        <a:t>재활용 TNS-2100 3대 랙 설치 · 전원 · IPMI 결선 · Master KVM 관리망 4회선</a:t>
                       </a:r>
                       <a:endParaRPr lang="en-US" sz="1200" dirty="0">
                         <a:latin typeface="맑은 고딕" charset="0"/>
@@ -11956,7 +13723,7 @@
                           <a:ea typeface="맑은 고딕" pitchFamily="34" charset="-122"/>
                           <a:cs typeface="맑은 고딕" pitchFamily="34" charset="-120"/>
                         </a:rPr>
-                        <a:t>신규 IP 망별 6개 할당 (bootstrap 1개는 master 구성 완료 후 반납)</a:t>
+                        <a:t>신규 IP 망별 7개 할당 (bootstrap 1개는 master 구성 완료 후 반납)</a:t>
                       </a:r>
                       <a:endParaRPr lang="en-US" sz="1200" dirty="0">
                         <a:latin typeface="맑은 고딕" charset="0"/>
@@ -20894,6 +22661,26 @@
             </a:r>
             <a:endParaRPr lang="en-US" sz="1000" dirty="0"/>
           </a:p>
+          <a:p>
+            <a:pPr indent="0" marL="0">
+              <a:spcAft>
+                <a:spcPts val="200"/>
+              </a:spcAft>
+              <a:buNone/>
+            </a:pPr>
+            <a:r>
+              <a:rPr lang="en-US" sz="1000" dirty="0">
+                <a:solidFill>
+                  <a:srgbClr val="334155"/>
+                </a:solidFill>
+                <a:latin typeface="맑은 고딕" pitchFamily="34" charset="0"/>
+                <a:ea typeface="맑은 고딕" pitchFamily="34" charset="-122"/>
+                <a:cs typeface="맑은 고딕" pitchFamily="34" charset="-120"/>
+              </a:rPr>
+              <a:t>관리망 4회선 (호스트 접속 2 · br0 브리지 2)</a:t>
+            </a:r>
+            <a:endParaRPr lang="en-US" sz="1000" dirty="0"/>
+          </a:p>
         </p:txBody>
       </p:sp>
       <p:sp>
@@ -23275,7 +25062,7 @@
                 <a:ea typeface="맑은 고딕" pitchFamily="34" charset="-122"/>
                 <a:cs typeface="맑은 고딕" pitchFamily="34" charset="-120"/>
               </a:rPr>
-              <a:t>신규 IP 4</a:t>
+              <a:t>신규 IP 5</a:t>
             </a:r>
             <a:endParaRPr lang="en-US" sz="1000" dirty="0"/>
           </a:p>
@@ -25243,7 +27030,7 @@
                 <a:ea typeface="맑은 고딕" pitchFamily="34" charset="-122"/>
                 <a:cs typeface="맑은 고딕" pitchFamily="34" charset="-120"/>
               </a:rPr>
-              <a:t>신규 IP 4</a:t>
+              <a:t>신규 IP 5</a:t>
             </a:r>
             <a:endParaRPr lang="en-US" sz="1000" dirty="0"/>
           </a:p>
@@ -26015,7 +27802,7 @@
                 <a:ea typeface="맑은 고딕" pitchFamily="34" charset="-122"/>
                 <a:cs typeface="맑은 고딕" pitchFamily="34" charset="-120"/>
               </a:rPr>
-              <a:t>기존 HV#03 재구성. 호스트 관리망 IP 없음 (br0 브리지만 구성)</a:t>
+              <a:t>기존 HV#03 재구성. 관리망 4회선: 2회선 호스트 원격접속(IP) · 2회선 br0 브리지(IP 없음)</a:t>
             </a:r>
             <a:endParaRPr lang="en-US" sz="950" dirty="0"/>
           </a:p>
@@ -28784,7 +30571,7 @@
         <p:spPr>
           <a:xfrm>
             <a:off x="3246120" y="2606040"/>
-            <a:ext cx="2377440" cy="822960"/>
+            <a:ext cx="1143000" cy="822960"/>
           </a:xfrm>
           <a:prstGeom prst="roundRect">
             <a:avLst>
@@ -28811,7 +30598,7 @@
         <p:spPr>
           <a:xfrm>
             <a:off x="3355848" y="2697480"/>
-            <a:ext cx="2157984" cy="685800"/>
+            <a:ext cx="923544" cy="685800"/>
           </a:xfrm>
           <a:prstGeom prst="rect">
             <a:avLst/>
@@ -28838,7 +30625,7 @@
                 <a:ea typeface="맑은 고딕" pitchFamily="34" charset="-122"/>
                 <a:cs typeface="맑은 고딕" pitchFamily="34" charset="-120"/>
               </a:rPr>
-              <a:t>bond0 → br0</a:t>
+              <a:t>bond0 (IP)</a:t>
             </a:r>
             <a:endParaRPr lang="en-US" sz="1000" dirty="0"/>
           </a:p>
@@ -28867,6 +30654,95 @@
       <p:sp>
         <p:nvSpPr>
           <p:cNvPr id="23" name="Shape 20"/>
+          <p:cNvSpPr/>
+          <p:nvPr/>
+        </p:nvSpPr>
+        <p:spPr>
+          <a:xfrm>
+            <a:off x="4480560" y="2606040"/>
+            <a:ext cx="1143000" cy="822960"/>
+          </a:xfrm>
+          <a:prstGeom prst="roundRect">
+            <a:avLst>
+              <a:gd name="adj" fmla="val 8889"/>
+            </a:avLst>
+          </a:prstGeom>
+          <a:solidFill>
+            <a:srgbClr val="EDE9FE"/>
+          </a:solidFill>
+          <a:ln w="12700">
+            <a:solidFill>
+              <a:srgbClr val="EDE9FE"/>
+            </a:solidFill>
+            <a:prstDash val="solid"/>
+          </a:ln>
+        </p:spPr>
+      </p:sp>
+      <p:sp>
+        <p:nvSpPr>
+          <p:cNvPr id="24" name="Text 21"/>
+          <p:cNvSpPr/>
+          <p:nvPr/>
+        </p:nvSpPr>
+        <p:spPr>
+          <a:xfrm>
+            <a:off x="4590288" y="2697480"/>
+            <a:ext cx="923544" cy="685800"/>
+          </a:xfrm>
+          <a:prstGeom prst="rect">
+            <a:avLst/>
+          </a:prstGeom>
+          <a:noFill/>
+          <a:ln/>
+        </p:spPr>
+        <p:txBody>
+          <a:bodyPr wrap="square" lIns="0" tIns="0" rIns="0" bIns="0" rtlCol="0" anchor="ctr"/>
+          <a:lstStyle/>
+          <a:p>
+            <a:pPr indent="0" marL="0">
+              <a:spcAft>
+                <a:spcPts val="200"/>
+              </a:spcAft>
+              <a:buNone/>
+            </a:pPr>
+            <a:r>
+              <a:rPr lang="en-US" sz="1000" dirty="0">
+                <a:solidFill>
+                  <a:srgbClr val="334155"/>
+                </a:solidFill>
+                <a:latin typeface="맑은 고딕" pitchFamily="34" charset="0"/>
+                <a:ea typeface="맑은 고딕" pitchFamily="34" charset="-122"/>
+                <a:cs typeface="맑은 고딕" pitchFamily="34" charset="-120"/>
+              </a:rPr>
+              <a:t>bond1 → br0</a:t>
+            </a:r>
+            <a:endParaRPr lang="en-US" sz="1000" dirty="0"/>
+          </a:p>
+          <a:p>
+            <a:pPr indent="0" marL="0">
+              <a:spcAft>
+                <a:spcPts val="200"/>
+              </a:spcAft>
+              <a:buNone/>
+            </a:pPr>
+            <a:r>
+              <a:rPr lang="en-US" sz="1000" dirty="0">
+                <a:solidFill>
+                  <a:srgbClr val="334155"/>
+                </a:solidFill>
+                <a:latin typeface="맑은 고딕" pitchFamily="34" charset="0"/>
+                <a:ea typeface="맑은 고딕" pitchFamily="34" charset="-122"/>
+                <a:cs typeface="맑은 고딕" pitchFamily="34" charset="-120"/>
+              </a:rPr>
+              <a:t>관리 2포트</a:t>
+            </a:r>
+            <a:endParaRPr lang="en-US" sz="1000" dirty="0"/>
+          </a:p>
+        </p:txBody>
+      </p:sp>
+      <p:sp>
+        <p:nvSpPr>
+          <p:cNvPr id="25" name="Shape 22"/>
           <p:cNvSpPr/>
           <p:nvPr/>
         </p:nvSpPr>
@@ -28893,7 +30769,7 @@
       </p:sp>
       <p:sp>
         <p:nvSpPr>
-          <p:cNvPr id="24" name="Text 21"/>
+          <p:cNvPr id="26" name="Text 23"/>
           <p:cNvSpPr/>
           <p:nvPr/>
         </p:nvSpPr>
@@ -28932,7 +30808,7 @@
       </p:sp>
       <p:sp>
         <p:nvSpPr>
-          <p:cNvPr id="25" name="Shape 22"/>
+          <p:cNvPr id="27" name="Shape 24"/>
           <p:cNvSpPr/>
           <p:nvPr/>
         </p:nvSpPr>
@@ -28959,7 +30835,7 @@
       </p:sp>
       <p:sp>
         <p:nvSpPr>
-          <p:cNvPr id="26" name="Text 23"/>
+          <p:cNvPr id="28" name="Text 25"/>
           <p:cNvSpPr/>
           <p:nvPr/>
         </p:nvSpPr>
@@ -29001,7 +30877,7 @@
       </p:sp>
       <p:sp>
         <p:nvSpPr>
-          <p:cNvPr id="27" name="Shape 24"/>
+          <p:cNvPr id="29" name="Shape 26"/>
           <p:cNvSpPr/>
           <p:nvPr/>
         </p:nvSpPr>
@@ -29028,7 +30904,7 @@
       </p:sp>
       <p:sp>
         <p:nvSpPr>
-          <p:cNvPr id="28" name="Text 25"/>
+          <p:cNvPr id="30" name="Text 27"/>
           <p:cNvSpPr/>
           <p:nvPr/>
         </p:nvSpPr>
@@ -29090,7 +30966,7 @@
       </p:sp>
       <p:sp>
         <p:nvSpPr>
-          <p:cNvPr id="29" name="Shape 26"/>
+          <p:cNvPr id="31" name="Shape 28"/>
           <p:cNvSpPr/>
           <p:nvPr/>
         </p:nvSpPr>
@@ -29117,7 +30993,7 @@
       </p:sp>
       <p:sp>
         <p:nvSpPr>
-          <p:cNvPr id="30" name="Text 27"/>
+          <p:cNvPr id="32" name="Text 29"/>
           <p:cNvSpPr/>
           <p:nvPr/>
         </p:nvSpPr>
@@ -29179,7 +31055,7 @@
       </p:sp>
       <p:sp>
         <p:nvSpPr>
-          <p:cNvPr id="31" name="Shape 28"/>
+          <p:cNvPr id="33" name="Shape 30"/>
           <p:cNvSpPr/>
           <p:nvPr/>
         </p:nvSpPr>
@@ -29206,7 +31082,7 @@
       </p:sp>
       <p:sp>
         <p:nvSpPr>
-          <p:cNvPr id="32" name="Text 29"/>
+          <p:cNvPr id="34" name="Text 31"/>
           <p:cNvSpPr/>
           <p:nvPr/>
         </p:nvSpPr>
@@ -29268,7 +31144,7 @@
       </p:sp>
       <p:sp>
         <p:nvSpPr>
-          <p:cNvPr id="33" name="Shape 30"/>
+          <p:cNvPr id="35" name="Shape 32"/>
           <p:cNvSpPr/>
           <p:nvPr/>
         </p:nvSpPr>
@@ -29291,7 +31167,7 @@
       </p:sp>
       <p:sp>
         <p:nvSpPr>
-          <p:cNvPr id="34" name="Shape 31"/>
+          <p:cNvPr id="36" name="Shape 33"/>
           <p:cNvSpPr/>
           <p:nvPr/>
         </p:nvSpPr>
@@ -29314,13 +31190,13 @@
       </p:sp>
       <p:sp>
         <p:nvSpPr>
-          <p:cNvPr id="35" name="Shape 32"/>
-          <p:cNvSpPr/>
-          <p:nvPr/>
-        </p:nvSpPr>
-        <p:spPr>
-          <a:xfrm>
-            <a:off x="4434840" y="3840480"/>
+          <p:cNvPr id="37" name="Shape 34"/>
+          <p:cNvSpPr/>
+          <p:nvPr/>
+        </p:nvSpPr>
+        <p:spPr>
+          <a:xfrm>
+            <a:off x="3822192" y="3840480"/>
             <a:ext cx="914" cy="731520"/>
           </a:xfrm>
           <a:prstGeom prst="line">
@@ -29337,13 +31213,13 @@
       </p:sp>
       <p:sp>
         <p:nvSpPr>
-          <p:cNvPr id="36" name="Shape 33"/>
-          <p:cNvSpPr/>
-          <p:nvPr/>
-        </p:nvSpPr>
-        <p:spPr>
-          <a:xfrm>
-            <a:off x="6949440" y="3840480"/>
+          <p:cNvPr id="38" name="Shape 35"/>
+          <p:cNvSpPr/>
+          <p:nvPr/>
+        </p:nvSpPr>
+        <p:spPr>
+          <a:xfrm>
+            <a:off x="5047488" y="3840480"/>
             <a:ext cx="914" cy="731520"/>
           </a:xfrm>
           <a:prstGeom prst="line">
@@ -29360,7 +31236,30 @@
       </p:sp>
       <p:sp>
         <p:nvSpPr>
-          <p:cNvPr id="37" name="Shape 34"/>
+          <p:cNvPr id="39" name="Shape 36"/>
+          <p:cNvSpPr/>
+          <p:nvPr/>
+        </p:nvSpPr>
+        <p:spPr>
+          <a:xfrm>
+            <a:off x="6949440" y="3840480"/>
+            <a:ext cx="914" cy="731520"/>
+          </a:xfrm>
+          <a:prstGeom prst="line">
+            <a:avLst/>
+          </a:prstGeom>
+          <a:noFill/>
+          <a:ln w="31750">
+            <a:solidFill>
+              <a:srgbClr val="6D5AA6"/>
+            </a:solidFill>
+            <a:prstDash val="solid"/>
+          </a:ln>
+        </p:spPr>
+      </p:sp>
+      <p:sp>
+        <p:nvSpPr>
+          <p:cNvPr id="40" name="Shape 37"/>
           <p:cNvSpPr/>
           <p:nvPr/>
         </p:nvSpPr>
@@ -29383,7 +31282,7 @@
       </p:sp>
       <p:sp>
         <p:nvSpPr>
-          <p:cNvPr id="38" name="Shape 35"/>
+          <p:cNvPr id="41" name="Shape 38"/>
           <p:cNvSpPr/>
           <p:nvPr/>
         </p:nvSpPr>
@@ -29406,7 +31305,7 @@
       </p:sp>
       <p:sp>
         <p:nvSpPr>
-          <p:cNvPr id="39" name="Shape 36"/>
+          <p:cNvPr id="42" name="Shape 39"/>
           <p:cNvSpPr/>
           <p:nvPr/>
         </p:nvSpPr>
@@ -29431,7 +31330,7 @@
       </p:sp>
       <p:sp>
         <p:nvSpPr>
-          <p:cNvPr id="40" name="Text 37"/>
+          <p:cNvPr id="43" name="Text 40"/>
           <p:cNvSpPr/>
           <p:nvPr/>
         </p:nvSpPr>
@@ -29470,7 +31369,7 @@
       </p:sp>
       <p:sp>
         <p:nvSpPr>
-          <p:cNvPr id="41" name="Shape 38"/>
+          <p:cNvPr id="44" name="Shape 41"/>
           <p:cNvSpPr/>
           <p:nvPr/>
         </p:nvSpPr>
@@ -29495,7 +31394,7 @@
       </p:sp>
       <p:sp>
         <p:nvSpPr>
-          <p:cNvPr id="42" name="Text 39"/>
+          <p:cNvPr id="45" name="Text 42"/>
           <p:cNvSpPr/>
           <p:nvPr/>
         </p:nvSpPr>
@@ -29534,7 +31433,7 @@
       </p:sp>
       <p:sp>
         <p:nvSpPr>
-          <p:cNvPr id="43" name="Shape 40"/>
+          <p:cNvPr id="46" name="Shape 43"/>
           <p:cNvSpPr/>
           <p:nvPr/>
         </p:nvSpPr>
@@ -29559,7 +31458,7 @@
       </p:sp>
       <p:sp>
         <p:nvSpPr>
-          <p:cNvPr id="44" name="Text 41"/>
+          <p:cNvPr id="47" name="Text 44"/>
           <p:cNvSpPr/>
           <p:nvPr/>
         </p:nvSpPr>
@@ -29598,7 +31497,7 @@
       </p:sp>
       <p:sp>
         <p:nvSpPr>
-          <p:cNvPr id="45" name="Shape 42"/>
+          <p:cNvPr id="48" name="Shape 45"/>
           <p:cNvSpPr/>
           <p:nvPr/>
         </p:nvSpPr>
@@ -29625,7 +31524,7 @@
       </p:sp>
       <p:sp>
         <p:nvSpPr>
-          <p:cNvPr id="46" name="Text 43"/>
+          <p:cNvPr id="49" name="Text 46"/>
           <p:cNvSpPr/>
           <p:nvPr/>
         </p:nvSpPr>
@@ -29664,7 +31563,7 @@
       </p:sp>
       <p:sp>
         <p:nvSpPr>
-          <p:cNvPr id="47" name="Text 44"/>
+          <p:cNvPr id="50" name="Text 47"/>
           <p:cNvSpPr/>
           <p:nvPr/>
         </p:nvSpPr>
@@ -29703,7 +31602,7 @@
       </p:sp>
       <p:sp>
         <p:nvSpPr>
-          <p:cNvPr id="48" name="Shape 45"/>
+          <p:cNvPr id="51" name="Shape 48"/>
           <p:cNvSpPr/>
           <p:nvPr/>
         </p:nvSpPr>
@@ -29730,7 +31629,7 @@
       </p:sp>
       <p:sp>
         <p:nvSpPr>
-          <p:cNvPr id="49" name="Text 46"/>
+          <p:cNvPr id="52" name="Text 49"/>
           <p:cNvSpPr/>
           <p:nvPr/>
         </p:nvSpPr>
@@ -29826,7 +31725,7 @@
       </p:sp>
       <p:sp>
         <p:nvSpPr>
-          <p:cNvPr id="50" name="Text 47"/>
+          <p:cNvPr id="53" name="Text 50"/>
           <p:cNvSpPr/>
           <p:nvPr/>
         </p:nvSpPr>
